--- a/report/Review_3_Team_20106UG02.pptx
+++ b/report/Review_3_Team_20106UG02.pptx
@@ -4408,7 +4408,8 @@
         </p:nvSpPr>
         <p:spPr>
           <a:xfrm>
-            <a:ext cx="0" cy="1920240"/>
+            <a:off x="841248" y="1371600"/>
+            <a:ext cx="10515600" cy="2057400"/>
           </a:xfrm>
         </p:spPr>
         <p:txBody>
@@ -4660,7 +4661,7 @@
         </p:blipFill>
         <p:spPr>
           <a:xfrm>
-            <a:off x="3078480" y="3886200"/>
+            <a:off x="3078480" y="3566160"/>
             <a:ext cx="6035040" cy="2462551"/>
           </a:xfrm>
           <a:prstGeom prst="rect">
@@ -5358,8 +5359,8 @@
         </p:nvSpPr>
         <p:spPr bwMode="auto">
           <a:xfrm>
-            <a:off x="545592" y="1442399"/>
-            <a:ext cx="10515600" cy="1938992"/>
+            <a:off x="640080" y="1325880"/>
+            <a:ext cx="10881360" cy="4754880"/>
           </a:xfrm>
           <a:prstGeom prst="rect">
             <a:avLst/>
@@ -7223,7 +7224,12 @@
             <p:ph idx="1"/>
           </p:nvPr>
         </p:nvSpPr>
-        <p:spPr/>
+        <p:spPr>
+          <a:xfrm>
+            <a:off x="841248" y="1280160"/>
+            <a:ext cx="10515600" cy="2697480"/>
+          </a:xfrm>
+        </p:spPr>
         <p:txBody>
           <a:bodyPr wrap="square">
             <a:normAutofit/>
@@ -7232,14 +7238,14 @@
           <a:p>
             <a:pPr>
               <a:lnSpc>
-                <a:spcPct val="100000"/>
+                <a:spcPct val="95000"/>
               </a:lnSpc>
               <a:spcAft>
                 <a:spcPts val="600"/>
               </a:spcAft>
             </a:pPr>
             <a:r>
-              <a:rPr sz="1400" b="0">
+              <a:rPr sz="1300" b="0">
                 <a:solidFill>
                   <a:srgbClr val="1A1A1A"/>
                 </a:solidFill>
@@ -7250,14 +7256,14 @@
           <a:p>
             <a:pPr>
               <a:lnSpc>
-                <a:spcPct val="100000"/>
+                <a:spcPct val="95000"/>
               </a:lnSpc>
               <a:spcAft>
                 <a:spcPts val="600"/>
               </a:spcAft>
             </a:pPr>
             <a:r>
-              <a:rPr sz="1400" b="0">
+              <a:rPr sz="1300" b="0">
                 <a:solidFill>
                   <a:srgbClr val="1A1A1A"/>
                 </a:solidFill>
@@ -7268,14 +7274,14 @@
           <a:p>
             <a:pPr>
               <a:lnSpc>
-                <a:spcPct val="100000"/>
+                <a:spcPct val="95000"/>
               </a:lnSpc>
               <a:spcAft>
                 <a:spcPts val="600"/>
               </a:spcAft>
             </a:pPr>
             <a:r>
-              <a:rPr sz="1400" b="0">
+              <a:rPr sz="1300" b="0">
                 <a:solidFill>
                   <a:srgbClr val="1A1A1A"/>
                 </a:solidFill>
@@ -7286,14 +7292,14 @@
           <a:p>
             <a:pPr>
               <a:lnSpc>
-                <a:spcPct val="100000"/>
+                <a:spcPct val="95000"/>
               </a:lnSpc>
               <a:spcAft>
                 <a:spcPts val="600"/>
               </a:spcAft>
             </a:pPr>
             <a:r>
-              <a:rPr sz="1400" b="0">
+              <a:rPr sz="1300" b="0">
                 <a:solidFill>
                   <a:srgbClr val="1A1A1A"/>
                 </a:solidFill>
@@ -7304,14 +7310,14 @@
           <a:p>
             <a:pPr>
               <a:lnSpc>
-                <a:spcPct val="100000"/>
+                <a:spcPct val="95000"/>
               </a:lnSpc>
               <a:spcAft>
                 <a:spcPts val="600"/>
               </a:spcAft>
             </a:pPr>
             <a:r>
-              <a:rPr sz="1400" b="0">
+              <a:rPr sz="1300" b="0">
                 <a:solidFill>
                   <a:srgbClr val="1A1A1A"/>
                 </a:solidFill>
@@ -7322,14 +7328,14 @@
           <a:p>
             <a:pPr>
               <a:lnSpc>
-                <a:spcPct val="100000"/>
+                <a:spcPct val="95000"/>
               </a:lnSpc>
               <a:spcAft>
                 <a:spcPts val="600"/>
               </a:spcAft>
             </a:pPr>
             <a:r>
-              <a:rPr sz="1400" b="0">
+              <a:rPr sz="1300" b="0">
                 <a:solidFill>
                   <a:srgbClr val="1A1A1A"/>
                 </a:solidFill>
@@ -7340,14 +7346,14 @@
           <a:p>
             <a:pPr>
               <a:lnSpc>
-                <a:spcPct val="100000"/>
+                <a:spcPct val="95000"/>
               </a:lnSpc>
               <a:spcAft>
                 <a:spcPts val="600"/>
               </a:spcAft>
             </a:pPr>
             <a:r>
-              <a:rPr sz="1400" b="0">
+              <a:rPr sz="1300" b="0">
                 <a:solidFill>
                   <a:srgbClr val="1A1A1A"/>
                 </a:solidFill>
@@ -7525,8 +7531,8 @@
         </p:nvSpPr>
         <p:spPr>
           <a:xfrm>
-            <a:off x="460248" y="4413148"/>
-            <a:ext cx="11523407" cy="892552"/>
+            <a:off x="548640" y="4069080"/>
+            <a:ext cx="11064240" cy="777240"/>
           </a:xfrm>
           <a:prstGeom prst="rect">
             <a:avLst/>
@@ -7541,14 +7547,14 @@
           <a:p>
             <a:pPr>
               <a:lnSpc>
-                <a:spcPct val="100000"/>
+                <a:spcPct val="95000"/>
               </a:lnSpc>
               <a:spcAft>
                 <a:spcPts val="600"/>
               </a:spcAft>
             </a:pPr>
             <a:r>
-              <a:rPr sz="1200" b="1">
+              <a:rPr sz="1150" b="1">
                 <a:solidFill>
                   <a:srgbClr val="1A1A1A"/>
                 </a:solidFill>
@@ -7559,19 +7565,19 @@
           <a:p>
             <a:pPr>
               <a:lnSpc>
-                <a:spcPct val="100000"/>
+                <a:spcPct val="95000"/>
               </a:lnSpc>
               <a:spcAft>
                 <a:spcPts val="600"/>
               </a:spcAft>
             </a:pPr>
             <a:r>
-              <a:rPr sz="1200" b="1">
+              <a:rPr sz="1150" b="1">
                 <a:solidFill>
                   <a:srgbClr val="1A1A1A"/>
                 </a:solidFill>
               </a:rPr>
-              <a:t>Outcome: Conference (Scopus) — paper drafted, target venue to be finalised</a:t>
+              <a:t>Outcome: Conference (Scopus) — paper drafted, target venue to be finalised with the guide</a:t>
             </a:r>
           </a:p>
         </p:txBody>
@@ -7598,8 +7604,8 @@
         </p:blipFill>
         <p:spPr>
           <a:xfrm>
-            <a:off x="1990701" y="4778273"/>
-            <a:ext cx="1968651" cy="1578077"/>
+            <a:off x="3246120" y="4864608"/>
+            <a:ext cx="1654035" cy="1325880"/>
           </a:xfrm>
           <a:prstGeom prst="rect">
             <a:avLst/>
@@ -7628,8 +7634,8 @@
         </p:blipFill>
         <p:spPr>
           <a:xfrm>
-            <a:off x="5237545" y="4413148"/>
-            <a:ext cx="2447027" cy="2232651"/>
+            <a:off x="7086600" y="4864608"/>
+            <a:ext cx="1453189" cy="1325880"/>
           </a:xfrm>
           <a:prstGeom prst="rect">
             <a:avLst/>
@@ -7690,7 +7696,8 @@
         </p:nvSpPr>
         <p:spPr>
           <a:xfrm>
-            <a:ext cx="10515600" cy="731520"/>
+            <a:off x="841248" y="1371600"/>
+            <a:ext cx="10515600" cy="777240"/>
           </a:xfrm>
         </p:spPr>
         <p:txBody>
@@ -7888,7 +7895,7 @@
         </p:blipFill>
         <p:spPr>
           <a:xfrm>
-            <a:off x="2895600" y="2331720"/>
+            <a:off x="2895600" y="2240280"/>
             <a:ext cx="6400800" cy="4036673"/>
           </a:xfrm>
           <a:prstGeom prst="rect">

--- a/report/Review_3_Team_20106UG02.pptx
+++ b/report/Review_3_Team_20106UG02.pptx
@@ -5359,8 +5359,8 @@
         </p:nvSpPr>
         <p:spPr bwMode="auto">
           <a:xfrm>
-            <a:off x="640080" y="1325880"/>
-            <a:ext cx="10881360" cy="4754880"/>
+            <a:off x="640080" y="1298448"/>
+            <a:ext cx="10881360" cy="4846320"/>
           </a:xfrm>
           <a:prstGeom prst="rect">
             <a:avLst/>
@@ -5410,93 +5410,174 @@
           <a:p>
             <a:pPr marL="0" indent="0" eaLnBrk="0" fontAlgn="base" hangingPunct="0">
               <a:lnSpc>
-                <a:spcPct val="100000"/>
+                <a:spcPct val="95000"/>
               </a:lnSpc>
               <a:spcBef>
                 <a:spcPct val="0"/>
               </a:spcBef>
               <a:spcAft>
-                <a:spcPts val="600"/>
+                <a:spcPts val="500"/>
               </a:spcAft>
               <a:buNone/>
             </a:pPr>
             <a:r>
-              <a:rPr sz="1100" b="0">
+              <a:rPr sz="1050" i="0">
                 <a:solidFill>
                   <a:srgbClr val="1A1A1A"/>
                 </a:solidFill>
-              </a:rPr>
-              <a:t>[1] National Institute of Standards and Technology, Module-Lattice-Based Key-Encapsulation Mechanism Standard, FIPS 203, Gaithersburg, MD, USA, Aug. 2024.</a:t>
+                <a:latin typeface="Times New Roman"/>
+              </a:rPr>
+              <a:t>[1] National Institute of Standards and Technology, </a:t>
+            </a:r>
+            <a:r>
+              <a:rPr sz="1050" i="1">
+                <a:solidFill>
+                  <a:srgbClr val="1A1A1A"/>
+                </a:solidFill>
+                <a:latin typeface="Times New Roman"/>
+              </a:rPr>
+              <a:t>Module-Lattice-Based Key-Encapsulation Mechanism Standard</a:t>
+            </a:r>
+            <a:r>
+              <a:rPr sz="1050" i="0">
+                <a:solidFill>
+                  <a:srgbClr val="1A1A1A"/>
+                </a:solidFill>
+                <a:latin typeface="Times New Roman"/>
+              </a:rPr>
+              <a:t>, FIPS 203, Gaithersburg, MD, USA, Aug. 2024.</a:t>
             </a:r>
           </a:p>
           <a:p>
             <a:pPr>
               <a:lnSpc>
-                <a:spcPct val="100000"/>
+                <a:spcPct val="95000"/>
               </a:lnSpc>
               <a:spcAft>
-                <a:spcPts val="600"/>
+                <a:spcPts val="500"/>
               </a:spcAft>
+              <a:buNone/>
             </a:pPr>
             <a:r>
-              <a:rPr sz="1100" b="0">
+              <a:rPr sz="1050" i="0">
                 <a:solidFill>
                   <a:srgbClr val="1A1A1A"/>
                 </a:solidFill>
-              </a:rPr>
-              <a:t>[2] National Institute of Standards and Technology, Module-Lattice-Based Digital Signature Standard, FIPS 204, Gaithersburg, MD, USA, Aug. 2024.</a:t>
+                <a:latin typeface="Times New Roman"/>
+              </a:rPr>
+              <a:t>[2] National Institute of Standards and Technology, </a:t>
+            </a:r>
+            <a:r>
+              <a:rPr sz="1050" i="1">
+                <a:solidFill>
+                  <a:srgbClr val="1A1A1A"/>
+                </a:solidFill>
+                <a:latin typeface="Times New Roman"/>
+              </a:rPr>
+              <a:t>Module-Lattice-Based Digital Signature Standard</a:t>
+            </a:r>
+            <a:r>
+              <a:rPr sz="1050" i="0">
+                <a:solidFill>
+                  <a:srgbClr val="1A1A1A"/>
+                </a:solidFill>
+                <a:latin typeface="Times New Roman"/>
+              </a:rPr>
+              <a:t>, FIPS 204, Gaithersburg, MD, USA, Aug. 2024.</a:t>
             </a:r>
           </a:p>
           <a:p>
             <a:pPr>
               <a:lnSpc>
-                <a:spcPct val="100000"/>
+                <a:spcPct val="95000"/>
               </a:lnSpc>
               <a:spcAft>
-                <a:spcPts val="600"/>
+                <a:spcPts val="500"/>
               </a:spcAft>
+              <a:buNone/>
             </a:pPr>
             <a:r>
-              <a:rPr sz="1100" b="0">
+              <a:rPr sz="1050" i="0">
                 <a:solidFill>
                   <a:srgbClr val="1A1A1A"/>
                 </a:solidFill>
-              </a:rPr>
-              <a:t>[3] National Institute of Standards and Technology, Stateless Hash-Based Digital Signature Standard, FIPS 205, Gaithersburg, MD, USA, Aug. 2024.</a:t>
+                <a:latin typeface="Times New Roman"/>
+              </a:rPr>
+              <a:t>[3] National Institute of Standards and Technology, </a:t>
+            </a:r>
+            <a:r>
+              <a:rPr sz="1050" i="1">
+                <a:solidFill>
+                  <a:srgbClr val="1A1A1A"/>
+                </a:solidFill>
+                <a:latin typeface="Times New Roman"/>
+              </a:rPr>
+              <a:t>Stateless Hash-Based Digital Signature Standard</a:t>
+            </a:r>
+            <a:r>
+              <a:rPr sz="1050" i="0">
+                <a:solidFill>
+                  <a:srgbClr val="1A1A1A"/>
+                </a:solidFill>
+                <a:latin typeface="Times New Roman"/>
+              </a:rPr>
+              <a:t>, FIPS 205, Gaithersburg, MD, USA, Aug. 2024.</a:t>
             </a:r>
           </a:p>
           <a:p>
             <a:pPr>
               <a:lnSpc>
-                <a:spcPct val="100000"/>
+                <a:spcPct val="95000"/>
               </a:lnSpc>
               <a:spcAft>
-                <a:spcPts val="600"/>
+                <a:spcPts val="500"/>
               </a:spcAft>
+              <a:buNone/>
             </a:pPr>
             <a:r>
-              <a:rPr sz="1100" b="0">
+              <a:rPr sz="1050" i="0">
                 <a:solidFill>
                   <a:srgbClr val="1A1A1A"/>
                 </a:solidFill>
-              </a:rPr>
-              <a:t>[4] National Cybersecurity Center of Excellence, Migration to Post-Quantum Cryptography, NIST Special Publication 1800-38, National Institute of Standards and Technology.</a:t>
+                <a:latin typeface="Times New Roman"/>
+              </a:rPr>
+              <a:t>[4] National Cybersecurity Center of Excellence, </a:t>
+            </a:r>
+            <a:r>
+              <a:rPr sz="1050" i="1">
+                <a:solidFill>
+                  <a:srgbClr val="1A1A1A"/>
+                </a:solidFill>
+                <a:latin typeface="Times New Roman"/>
+              </a:rPr>
+              <a:t>Migration to Post-Quantum Cryptography</a:t>
+            </a:r>
+            <a:r>
+              <a:rPr sz="1050" i="0">
+                <a:solidFill>
+                  <a:srgbClr val="1A1A1A"/>
+                </a:solidFill>
+                <a:latin typeface="Times New Roman"/>
+              </a:rPr>
+              <a:t>, NIST Special Publication 1800-38, Gaithersburg, MD, USA.</a:t>
             </a:r>
           </a:p>
           <a:p>
             <a:pPr>
               <a:lnSpc>
-                <a:spcPct val="100000"/>
+                <a:spcPct val="95000"/>
               </a:lnSpc>
               <a:spcAft>
-                <a:spcPts val="600"/>
+                <a:spcPts val="500"/>
               </a:spcAft>
+              <a:buNone/>
             </a:pPr>
             <a:r>
-              <a:rPr sz="1100" b="0">
+              <a:rPr sz="1050" i="0">
                 <a:solidFill>
                   <a:srgbClr val="1A1A1A"/>
                 </a:solidFill>
+                <a:latin typeface="Times New Roman"/>
               </a:rPr>
               <a:t>[5] G. Pope, “kyber-py: A pure-Python implementation of ML-KEM (FIPS 203),” software repository, version 1.2.0.</a:t>
             </a:r>
@@ -5504,17 +5585,19 @@
           <a:p>
             <a:pPr>
               <a:lnSpc>
-                <a:spcPct val="100000"/>
+                <a:spcPct val="95000"/>
               </a:lnSpc>
               <a:spcAft>
-                <a:spcPts val="600"/>
+                <a:spcPts val="500"/>
               </a:spcAft>
+              <a:buNone/>
             </a:pPr>
             <a:r>
-              <a:rPr sz="1100" b="0">
+              <a:rPr sz="1050" i="0">
                 <a:solidFill>
                   <a:srgbClr val="1A1A1A"/>
                 </a:solidFill>
+                <a:latin typeface="Times New Roman"/>
               </a:rPr>
               <a:t>[6] G. Pope, “dilithium-py: A pure-Python implementation of ML-DSA (FIPS 204),” software repository, version 1.4.0.</a:t>
             </a:r>
@@ -5522,37 +5605,191 @@
           <a:p>
             <a:pPr>
               <a:lnSpc>
-                <a:spcPct val="100000"/>
+                <a:spcPct val="95000"/>
               </a:lnSpc>
               <a:spcAft>
-                <a:spcPts val="600"/>
+                <a:spcPts val="500"/>
               </a:spcAft>
+              <a:buNone/>
             </a:pPr>
             <a:r>
-              <a:rPr sz="1100" b="0">
+              <a:rPr sz="1050" i="0">
                 <a:solidFill>
                   <a:srgbClr val="1A1A1A"/>
                 </a:solidFill>
-              </a:rPr>
-              <a:t>[7] W. Barker, W. Polk and M. Souppaya, Getting Ready for Post-Quantum Cryptography: Exploring Challenges Associated with Adopting and Using Post-Quantum Cryptographic Algorithms, NIST Cybersecurity White Paper, 2021.</a:t>
+                <a:latin typeface="Times New Roman"/>
+              </a:rPr>
+              <a:t>[7] W. Barker, W. Polk and M. Souppaya, </a:t>
+            </a:r>
+            <a:r>
+              <a:rPr sz="1050" i="1">
+                <a:solidFill>
+                  <a:srgbClr val="1A1A1A"/>
+                </a:solidFill>
+                <a:latin typeface="Times New Roman"/>
+              </a:rPr>
+              <a:t>Getting Ready for Post-Quantum Cryptography</a:t>
+            </a:r>
+            <a:r>
+              <a:rPr sz="1050" i="0">
+                <a:solidFill>
+                  <a:srgbClr val="1A1A1A"/>
+                </a:solidFill>
+                <a:latin typeface="Times New Roman"/>
+              </a:rPr>
+              <a:t>, NIST Cybersecurity White Paper, 2021.</a:t>
             </a:r>
           </a:p>
           <a:p>
             <a:pPr>
               <a:lnSpc>
-                <a:spcPct val="100000"/>
+                <a:spcPct val="95000"/>
               </a:lnSpc>
               <a:spcAft>
-                <a:spcPts val="600"/>
+                <a:spcPts val="500"/>
               </a:spcAft>
+              <a:buNone/>
             </a:pPr>
             <a:r>
-              <a:rPr sz="1100" b="0">
+              <a:rPr sz="1050" i="0">
                 <a:solidFill>
                   <a:srgbClr val="1A1A1A"/>
                 </a:solidFill>
-              </a:rPr>
-              <a:t>[8] M. Chen et al., “Evaluating large language models trained on code,” arXiv preprint arXiv:2107.03374, 2021.</a:t>
+                <a:latin typeface="Times New Roman"/>
+              </a:rPr>
+              <a:t>[8] M. Chen et al., “Evaluating large language models trained on code,” </a:t>
+            </a:r>
+            <a:r>
+              <a:rPr sz="1050" i="1">
+                <a:solidFill>
+                  <a:srgbClr val="1A1A1A"/>
+                </a:solidFill>
+                <a:latin typeface="Times New Roman"/>
+              </a:rPr>
+              <a:t>arXiv preprint</a:t>
+            </a:r>
+            <a:r>
+              <a:rPr sz="1050" i="0">
+                <a:solidFill>
+                  <a:srgbClr val="1A1A1A"/>
+                </a:solidFill>
+                <a:latin typeface="Times New Roman"/>
+              </a:rPr>
+              <a:t> arXiv:2107.03374, 2021.</a:t>
+            </a:r>
+          </a:p>
+          <a:p>
+            <a:pPr>
+              <a:lnSpc>
+                <a:spcPct val="95000"/>
+              </a:lnSpc>
+              <a:spcAft>
+                <a:spcPts val="500"/>
+              </a:spcAft>
+              <a:buNone/>
+            </a:pPr>
+            <a:r>
+              <a:rPr sz="1050" i="0">
+                <a:solidFill>
+                  <a:srgbClr val="1A1A1A"/>
+                </a:solidFill>
+                <a:latin typeface="Times New Roman"/>
+              </a:rPr>
+              <a:t>[9] M. Mosca, “Cybersecurity in an era with quantum computers: Will we be ready?,” </a:t>
+            </a:r>
+            <a:r>
+              <a:rPr sz="1050" i="1">
+                <a:solidFill>
+                  <a:srgbClr val="1A1A1A"/>
+                </a:solidFill>
+                <a:latin typeface="Times New Roman"/>
+              </a:rPr>
+              <a:t>IEEE Security &amp; Privacy</a:t>
+            </a:r>
+            <a:r>
+              <a:rPr sz="1050" i="0">
+                <a:solidFill>
+                  <a:srgbClr val="1A1A1A"/>
+                </a:solidFill>
+                <a:latin typeface="Times New Roman"/>
+              </a:rPr>
+              <a:t>, vol. 16, no. 5, pp. 38-41, 2018.</a:t>
+            </a:r>
+          </a:p>
+          <a:p>
+            <a:pPr>
+              <a:lnSpc>
+                <a:spcPct val="95000"/>
+              </a:lnSpc>
+              <a:spcAft>
+                <a:spcPts val="500"/>
+              </a:spcAft>
+              <a:buNone/>
+            </a:pPr>
+            <a:r>
+              <a:rPr sz="1050" i="0">
+                <a:solidFill>
+                  <a:srgbClr val="1A1A1A"/>
+                </a:solidFill>
+                <a:latin typeface="Times New Roman"/>
+              </a:rPr>
+              <a:t>[10] D. Stebila and M. Mosca, “Post-quantum key exchange for the Internet and the Open Quantum Safe project,” in </a:t>
+            </a:r>
+            <a:r>
+              <a:rPr sz="1050" i="1">
+                <a:solidFill>
+                  <a:srgbClr val="1A1A1A"/>
+                </a:solidFill>
+                <a:latin typeface="Times New Roman"/>
+              </a:rPr>
+              <a:t>Proc. Selected Areas in Cryptography (SAC 2016)</a:t>
+            </a:r>
+            <a:r>
+              <a:rPr sz="1050" i="0">
+                <a:solidFill>
+                  <a:srgbClr val="1A1A1A"/>
+                </a:solidFill>
+                <a:latin typeface="Times New Roman"/>
+              </a:rPr>
+              <a:t>, LNCS vol. 10532, pp. 14-37.</a:t>
+            </a:r>
+          </a:p>
+          <a:p>
+            <a:pPr>
+              <a:lnSpc>
+                <a:spcPct val="95000"/>
+              </a:lnSpc>
+              <a:spcAft>
+                <a:spcPts val="500"/>
+              </a:spcAft>
+              <a:buNone/>
+            </a:pPr>
+            <a:r>
+              <a:rPr sz="1050" i="0">
+                <a:solidFill>
+                  <a:srgbClr val="1A1A1A"/>
+                </a:solidFill>
+                <a:latin typeface="Times New Roman"/>
+              </a:rPr>
+              <a:t>[11] P. W. Shor, “Polynomial-time algorithms for prime factorization and discrete logarithms on a quantum computer,” </a:t>
+            </a:r>
+            <a:r>
+              <a:rPr sz="1050" i="1">
+                <a:solidFill>
+                  <a:srgbClr val="1A1A1A"/>
+                </a:solidFill>
+                <a:latin typeface="Times New Roman"/>
+              </a:rPr>
+              <a:t>SIAM Journal on Computing</a:t>
+            </a:r>
+            <a:r>
+              <a:rPr sz="1050" i="0">
+                <a:solidFill>
+                  <a:srgbClr val="1A1A1A"/>
+                </a:solidFill>
+                <a:latin typeface="Times New Roman"/>
+              </a:rPr>
+              <a:t>, vol. 26, no. 5, pp. 1484-1509, 1997.</a:t>
             </a:r>
           </a:p>
         </p:txBody>
@@ -6654,36 +6891,6 @@
           </a:p>
         </p:txBody>
       </p:sp>
-      <p:pic>
-        <p:nvPicPr>
-          <p:cNvPr id="7" name="Picture 6">
-            <a:extLst>
-              <a:ext uri="{FF2B5EF4-FFF2-40B4-BE49-F238E27FC236}">
-                <a16:creationId xmlns:a16="http://schemas.microsoft.com/office/drawing/2014/main" xmlns="" id="{2EB6993A-B8FB-1E92-71D4-98155A7EDC1C}"/>
-              </a:ext>
-            </a:extLst>
-          </p:cNvPr>
-          <p:cNvPicPr>
-            <a:picLocks noChangeAspect="1"/>
-          </p:cNvPicPr>
-          <p:nvPr/>
-        </p:nvPicPr>
-        <p:blipFill>
-          <a:blip r:embed="rId3"/>
-          <a:stretch>
-            <a:fillRect/>
-          </a:stretch>
-        </p:blipFill>
-        <p:spPr>
-          <a:xfrm>
-            <a:off x="636858" y="4611603"/>
-            <a:ext cx="4017612" cy="487722"/>
-          </a:xfrm>
-          <a:prstGeom prst="rect">
-            <a:avLst/>
-          </a:prstGeom>
-        </p:spPr>
-      </p:pic>
       <p:sp>
         <p:nvSpPr>
           <p:cNvPr id="8" name="Date Placeholder 7">
@@ -6770,101 +6977,902 @@
           </a:p>
         </p:txBody>
       </p:sp>
-      <p:sp>
-        <p:nvSpPr>
-          <p:cNvPr id="11" name="TextBox 10"/>
-          <p:cNvSpPr txBox="1"/>
+      <p:graphicFrame>
+        <p:nvGraphicFramePr>
+          <p:cNvPr id="11" name="Table 10"/>
+          <p:cNvGraphicFramePr>
+            <a:graphicFrameLocks noGrp="1"/>
+          </p:cNvGraphicFramePr>
           <p:nvPr/>
-        </p:nvSpPr>
-        <p:spPr>
-          <a:xfrm>
-            <a:off x="841248" y="1417320"/>
-            <a:ext cx="10515600" cy="2926080"/>
-          </a:xfrm>
-          <a:prstGeom prst="rect">
-            <a:avLst/>
-          </a:prstGeom>
-          <a:noFill/>
-        </p:spPr>
-        <p:txBody>
-          <a:bodyPr wrap="square">
-            <a:spAutoFit/>
-          </a:bodyPr>
-          <a:lstStyle/>
-          <a:p>
-            <a:pPr>
-              <a:lnSpc>
-                <a:spcPct val="100000"/>
-              </a:lnSpc>
-              <a:spcAft>
-                <a:spcPts val="600"/>
-              </a:spcAft>
-            </a:pPr>
-            <a:r>
-              <a:rPr sz="1500" b="0">
-                <a:solidFill>
-                  <a:srgbClr val="1A1A1A"/>
-                </a:solidFill>
-              </a:rPr>
-              <a:t>Cryptographic discovery — NCCoE SP 1800-38: inventory is the first step, but stops at a catalogue; no recommendation, no code change.</a:t>
-            </a:r>
-          </a:p>
-          <a:p>
-            <a:pPr>
-              <a:lnSpc>
-                <a:spcPct val="100000"/>
-              </a:lnSpc>
-              <a:spcAft>
-                <a:spcPts val="600"/>
-              </a:spcAft>
-            </a:pPr>
-            <a:r>
-              <a:rPr sz="1500" b="0">
-                <a:solidFill>
-                  <a:srgbClr val="1A1A1A"/>
-                </a:solidFill>
-              </a:rPr>
-              <a:t>Standards and guidance — FIPS 203/204/205 and NIST white papers define the destination and crypto-agility, not a path for existing code.</a:t>
-            </a:r>
-          </a:p>
-          <a:p>
-            <a:pPr>
-              <a:lnSpc>
-                <a:spcPct val="100000"/>
-              </a:lnSpc>
-              <a:spcAft>
-                <a:spcPts val="600"/>
-              </a:spcAft>
-            </a:pPr>
-            <a:r>
-              <a:rPr sz="1500" b="0">
-                <a:solidFill>
-                  <a:srgbClr val="1A1A1A"/>
-                </a:solidFill>
-              </a:rPr>
-              <a:t>PQC implementations — liboqs, kyber-py, dilithium-py supply the primitives but do not migrate anything.</a:t>
-            </a:r>
-          </a:p>
-          <a:p>
-            <a:pPr>
-              <a:lnSpc>
-                <a:spcPct val="100000"/>
-              </a:lnSpc>
-              <a:spcAft>
-                <a:spcPts val="600"/>
-              </a:spcAft>
-            </a:pPr>
-            <a:r>
-              <a:rPr sz="1500" b="0">
-                <a:solidFill>
-                  <a:srgbClr val="1A1A1A"/>
-                </a:solidFill>
-              </a:rPr>
-              <a:t>LLM code transformation — promising on isolated functions, but output always requires human verification before it can be trusted.</a:t>
-            </a:r>
-          </a:p>
-        </p:txBody>
-      </p:sp>
+        </p:nvGraphicFramePr>
+        <p:xfrm>
+          <a:off x="384048" y="1325880"/>
+          <a:ext cx="11430000" cy="4754880"/>
+        </p:xfrm>
+        <a:graphic>
+          <a:graphicData uri="http://schemas.openxmlformats.org/drawingml/2006/table">
+            <a:tbl>
+              <a:tblPr firstRow="1">
+                <a:tableStyleId>{5C22544A-7EE6-4342-B048-85BDC9FD1C3A}</a:tableStyleId>
+              </a:tblPr>
+              <a:tblGrid>
+                <a:gridCol w="2057400"/>
+                <a:gridCol w="2057400"/>
+                <a:gridCol w="2240280"/>
+                <a:gridCol w="2514600"/>
+                <a:gridCol w="2560320"/>
+              </a:tblGrid>
+              <a:tr h="792480">
+                <a:tc>
+                  <a:txBody>
+                    <a:bodyPr wrap="square"/>
+                    <a:lstStyle/>
+                    <a:p>
+                      <a:pPr>
+                        <a:lnSpc>
+                          <a:spcPct val="92000"/>
+                        </a:lnSpc>
+                      </a:pPr>
+                      <a:r>
+                        <a:rPr sz="1200" b="1">
+                          <a:solidFill>
+                            <a:srgbClr val="FFFFFF"/>
+                          </a:solidFill>
+                        </a:rPr>
+                        <a:t>Paper / Source</a:t>
+                      </a:r>
+                    </a:p>
+                  </a:txBody>
+                  <a:tcPr marL="64008" marR="64008" marT="27432" marB="27432">
+                    <a:solidFill>
+                      <a:srgbClr val="4472C4"/>
+                    </a:solidFill>
+                  </a:tcPr>
+                </a:tc>
+                <a:tc>
+                  <a:txBody>
+                    <a:bodyPr wrap="square"/>
+                    <a:lstStyle/>
+                    <a:p>
+                      <a:pPr>
+                        <a:lnSpc>
+                          <a:spcPct val="92000"/>
+                        </a:lnSpc>
+                      </a:pPr>
+                      <a:r>
+                        <a:rPr sz="1200" b="1">
+                          <a:solidFill>
+                            <a:srgbClr val="FFFFFF"/>
+                          </a:solidFill>
+                        </a:rPr>
+                        <a:t>Objective</a:t>
+                      </a:r>
+                    </a:p>
+                  </a:txBody>
+                  <a:tcPr marL="64008" marR="64008" marT="27432" marB="27432">
+                    <a:solidFill>
+                      <a:srgbClr val="4472C4"/>
+                    </a:solidFill>
+                  </a:tcPr>
+                </a:tc>
+                <a:tc>
+                  <a:txBody>
+                    <a:bodyPr wrap="square"/>
+                    <a:lstStyle/>
+                    <a:p>
+                      <a:pPr>
+                        <a:lnSpc>
+                          <a:spcPct val="92000"/>
+                        </a:lnSpc>
+                      </a:pPr>
+                      <a:r>
+                        <a:rPr sz="1200" b="1">
+                          <a:solidFill>
+                            <a:srgbClr val="FFFFFF"/>
+                          </a:solidFill>
+                        </a:rPr>
+                        <a:t>Methodology</a:t>
+                      </a:r>
+                    </a:p>
+                  </a:txBody>
+                  <a:tcPr marL="64008" marR="64008" marT="27432" marB="27432">
+                    <a:solidFill>
+                      <a:srgbClr val="4472C4"/>
+                    </a:solidFill>
+                  </a:tcPr>
+                </a:tc>
+                <a:tc>
+                  <a:txBody>
+                    <a:bodyPr wrap="square"/>
+                    <a:lstStyle/>
+                    <a:p>
+                      <a:pPr>
+                        <a:lnSpc>
+                          <a:spcPct val="92000"/>
+                        </a:lnSpc>
+                      </a:pPr>
+                      <a:r>
+                        <a:rPr sz="1200" b="1">
+                          <a:solidFill>
+                            <a:srgbClr val="FFFFFF"/>
+                          </a:solidFill>
+                        </a:rPr>
+                        <a:t>Pros / Cons</a:t>
+                      </a:r>
+                    </a:p>
+                  </a:txBody>
+                  <a:tcPr marL="64008" marR="64008" marT="27432" marB="27432">
+                    <a:solidFill>
+                      <a:srgbClr val="4472C4"/>
+                    </a:solidFill>
+                  </a:tcPr>
+                </a:tc>
+                <a:tc>
+                  <a:txBody>
+                    <a:bodyPr wrap="square"/>
+                    <a:lstStyle/>
+                    <a:p>
+                      <a:pPr>
+                        <a:lnSpc>
+                          <a:spcPct val="92000"/>
+                        </a:lnSpc>
+                      </a:pPr>
+                      <a:r>
+                        <a:rPr sz="1200" b="1">
+                          <a:solidFill>
+                            <a:srgbClr val="FFFFFF"/>
+                          </a:solidFill>
+                        </a:rPr>
+                        <a:t>Findings</a:t>
+                      </a:r>
+                    </a:p>
+                  </a:txBody>
+                  <a:tcPr marL="64008" marR="64008" marT="27432" marB="27432">
+                    <a:solidFill>
+                      <a:srgbClr val="4472C4"/>
+                    </a:solidFill>
+                  </a:tcPr>
+                </a:tc>
+              </a:tr>
+              <a:tr h="792480">
+                <a:tc>
+                  <a:txBody>
+                    <a:bodyPr wrap="square"/>
+                    <a:lstStyle/>
+                    <a:p>
+                      <a:pPr>
+                        <a:lnSpc>
+                          <a:spcPct val="92000"/>
+                        </a:lnSpc>
+                      </a:pPr>
+                      <a:r>
+                        <a:rPr sz="950" b="0">
+                          <a:solidFill>
+                            <a:srgbClr val="1A1A1A"/>
+                          </a:solidFill>
+                        </a:rPr>
+                        <a:t>NIST FIPS 203, 204, 205 (2024)</a:t>
+                      </a:r>
+                    </a:p>
+                  </a:txBody>
+                  <a:tcPr marL="64008" marR="64008" marT="27432" marB="27432">
+                    <a:solidFill>
+                      <a:srgbClr val="CCD7EA"/>
+                    </a:solidFill>
+                  </a:tcPr>
+                </a:tc>
+                <a:tc>
+                  <a:txBody>
+                    <a:bodyPr wrap="square"/>
+                    <a:lstStyle/>
+                    <a:p>
+                      <a:pPr>
+                        <a:lnSpc>
+                          <a:spcPct val="92000"/>
+                        </a:lnSpc>
+                      </a:pPr>
+                      <a:r>
+                        <a:rPr sz="950" b="0">
+                          <a:solidFill>
+                            <a:srgbClr val="1A1A1A"/>
+                          </a:solidFill>
+                        </a:rPr>
+                        <a:t>Standardise quantum-resistant KEM and signature schemes</a:t>
+                      </a:r>
+                    </a:p>
+                  </a:txBody>
+                  <a:tcPr marL="64008" marR="64008" marT="27432" marB="27432">
+                    <a:solidFill>
+                      <a:srgbClr val="CCD7EA"/>
+                    </a:solidFill>
+                  </a:tcPr>
+                </a:tc>
+                <a:tc>
+                  <a:txBody>
+                    <a:bodyPr wrap="square"/>
+                    <a:lstStyle/>
+                    <a:p>
+                      <a:pPr>
+                        <a:lnSpc>
+                          <a:spcPct val="92000"/>
+                        </a:lnSpc>
+                      </a:pPr>
+                      <a:r>
+                        <a:rPr sz="950" b="0">
+                          <a:solidFill>
+                            <a:srgbClr val="1A1A1A"/>
+                          </a:solidFill>
+                        </a:rPr>
+                        <a:t>Multi-round public evaluation of lattice and hash-based candidates</a:t>
+                      </a:r>
+                    </a:p>
+                  </a:txBody>
+                  <a:tcPr marL="64008" marR="64008" marT="27432" marB="27432">
+                    <a:solidFill>
+                      <a:srgbClr val="CCD7EA"/>
+                    </a:solidFill>
+                  </a:tcPr>
+                </a:tc>
+                <a:tc>
+                  <a:txBody>
+                    <a:bodyPr wrap="square"/>
+                    <a:lstStyle/>
+                    <a:p>
+                      <a:pPr>
+                        <a:lnSpc>
+                          <a:spcPct val="92000"/>
+                        </a:lnSpc>
+                      </a:pPr>
+                      <a:r>
+                        <a:rPr sz="950" b="0">
+                          <a:solidFill>
+                            <a:srgbClr val="1A1A1A"/>
+                          </a:solidFill>
+                        </a:rPr>
+                        <a:t>Pro: settles which algorithms to adopt.</a:t>
+                      </a:r>
+                    </a:p>
+                    <a:p>
+                      <a:pPr>
+                        <a:lnSpc>
+                          <a:spcPct val="92000"/>
+                        </a:lnSpc>
+                      </a:pPr>
+                      <a:r>
+                        <a:rPr sz="950" b="0">
+                          <a:solidFill>
+                            <a:srgbClr val="1A1A1A"/>
+                          </a:solidFill>
+                        </a:rPr>
+                        <a:t>Con: silent on migrating existing code</a:t>
+                      </a:r>
+                    </a:p>
+                  </a:txBody>
+                  <a:tcPr marL="64008" marR="64008" marT="27432" marB="27432">
+                    <a:solidFill>
+                      <a:srgbClr val="CCD7EA"/>
+                    </a:solidFill>
+                  </a:tcPr>
+                </a:tc>
+                <a:tc>
+                  <a:txBody>
+                    <a:bodyPr wrap="square"/>
+                    <a:lstStyle/>
+                    <a:p>
+                      <a:pPr>
+                        <a:lnSpc>
+                          <a:spcPct val="92000"/>
+                        </a:lnSpc>
+                      </a:pPr>
+                      <a:r>
+                        <a:rPr sz="950" b="0">
+                          <a:solidFill>
+                            <a:srgbClr val="1A1A1A"/>
+                          </a:solidFill>
+                        </a:rPr>
+                        <a:t>ML-KEM, ML-DSA and SLH-DSA with defined parameter sets per security category</a:t>
+                      </a:r>
+                    </a:p>
+                  </a:txBody>
+                  <a:tcPr marL="64008" marR="64008" marT="27432" marB="27432">
+                    <a:solidFill>
+                      <a:srgbClr val="CCD7EA"/>
+                    </a:solidFill>
+                  </a:tcPr>
+                </a:tc>
+              </a:tr>
+              <a:tr h="792480">
+                <a:tc>
+                  <a:txBody>
+                    <a:bodyPr wrap="square"/>
+                    <a:lstStyle/>
+                    <a:p>
+                      <a:pPr>
+                        <a:lnSpc>
+                          <a:spcPct val="92000"/>
+                        </a:lnSpc>
+                      </a:pPr>
+                      <a:r>
+                        <a:rPr sz="950" b="0">
+                          <a:solidFill>
+                            <a:srgbClr val="1A1A1A"/>
+                          </a:solidFill>
+                        </a:rPr>
+                        <a:t>NCCoE, NIST SP 1800-38 — Migration to PQC</a:t>
+                      </a:r>
+                    </a:p>
+                  </a:txBody>
+                  <a:tcPr marL="64008" marR="64008" marT="27432" marB="27432">
+                    <a:solidFill>
+                      <a:srgbClr val="DEE6F2"/>
+                    </a:solidFill>
+                  </a:tcPr>
+                </a:tc>
+                <a:tc>
+                  <a:txBody>
+                    <a:bodyPr wrap="square"/>
+                    <a:lstStyle/>
+                    <a:p>
+                      <a:pPr>
+                        <a:lnSpc>
+                          <a:spcPct val="92000"/>
+                        </a:lnSpc>
+                      </a:pPr>
+                      <a:r>
+                        <a:rPr sz="950" b="0">
+                          <a:solidFill>
+                            <a:srgbClr val="1A1A1A"/>
+                          </a:solidFill>
+                        </a:rPr>
+                        <a:t>Define a migration programme for enterprises</a:t>
+                      </a:r>
+                    </a:p>
+                  </a:txBody>
+                  <a:tcPr marL="64008" marR="64008" marT="27432" marB="27432">
+                    <a:solidFill>
+                      <a:srgbClr val="DEE6F2"/>
+                    </a:solidFill>
+                  </a:tcPr>
+                </a:tc>
+                <a:tc>
+                  <a:txBody>
+                    <a:bodyPr wrap="square"/>
+                    <a:lstStyle/>
+                    <a:p>
+                      <a:pPr>
+                        <a:lnSpc>
+                          <a:spcPct val="92000"/>
+                        </a:lnSpc>
+                      </a:pPr>
+                      <a:r>
+                        <a:rPr sz="950" b="0">
+                          <a:solidFill>
+                            <a:srgbClr val="1A1A1A"/>
+                          </a:solidFill>
+                        </a:rPr>
+                        <a:t>Practice guidance centred on cryptographic discovery and inventory</a:t>
+                      </a:r>
+                    </a:p>
+                  </a:txBody>
+                  <a:tcPr marL="64008" marR="64008" marT="27432" marB="27432">
+                    <a:solidFill>
+                      <a:srgbClr val="DEE6F2"/>
+                    </a:solidFill>
+                  </a:tcPr>
+                </a:tc>
+                <a:tc>
+                  <a:txBody>
+                    <a:bodyPr wrap="square"/>
+                    <a:lstStyle/>
+                    <a:p>
+                      <a:pPr>
+                        <a:lnSpc>
+                          <a:spcPct val="92000"/>
+                        </a:lnSpc>
+                      </a:pPr>
+                      <a:r>
+                        <a:rPr sz="950" b="0">
+                          <a:solidFill>
+                            <a:srgbClr val="1A1A1A"/>
+                          </a:solidFill>
+                        </a:rPr>
+                        <a:t>Pro: establishes discovery as the first step.</a:t>
+                      </a:r>
+                    </a:p>
+                    <a:p>
+                      <a:pPr>
+                        <a:lnSpc>
+                          <a:spcPct val="92000"/>
+                        </a:lnSpc>
+                      </a:pPr>
+                      <a:r>
+                        <a:rPr sz="950" b="0">
+                          <a:solidFill>
+                            <a:srgbClr val="1A1A1A"/>
+                          </a:solidFill>
+                        </a:rPr>
+                        <a:t>Con: produces an inventory only</a:t>
+                      </a:r>
+                    </a:p>
+                  </a:txBody>
+                  <a:tcPr marL="64008" marR="64008" marT="27432" marB="27432">
+                    <a:solidFill>
+                      <a:srgbClr val="DEE6F2"/>
+                    </a:solidFill>
+                  </a:tcPr>
+                </a:tc>
+                <a:tc>
+                  <a:txBody>
+                    <a:bodyPr wrap="square"/>
+                    <a:lstStyle/>
+                    <a:p>
+                      <a:pPr>
+                        <a:lnSpc>
+                          <a:spcPct val="92000"/>
+                        </a:lnSpc>
+                      </a:pPr>
+                      <a:r>
+                        <a:rPr sz="950" b="0">
+                          <a:solidFill>
+                            <a:srgbClr val="1A1A1A"/>
+                          </a:solidFill>
+                        </a:rPr>
+                        <a:t>Knowing where crypto lives does not say what should replace it</a:t>
+                      </a:r>
+                    </a:p>
+                  </a:txBody>
+                  <a:tcPr marL="64008" marR="64008" marT="27432" marB="27432">
+                    <a:solidFill>
+                      <a:srgbClr val="DEE6F2"/>
+                    </a:solidFill>
+                  </a:tcPr>
+                </a:tc>
+              </a:tr>
+              <a:tr h="792480">
+                <a:tc>
+                  <a:txBody>
+                    <a:bodyPr wrap="square"/>
+                    <a:lstStyle/>
+                    <a:p>
+                      <a:pPr>
+                        <a:lnSpc>
+                          <a:spcPct val="92000"/>
+                        </a:lnSpc>
+                      </a:pPr>
+                      <a:r>
+                        <a:rPr sz="950" b="0">
+                          <a:solidFill>
+                            <a:srgbClr val="1A1A1A"/>
+                          </a:solidFill>
+                        </a:rPr>
+                        <a:t>Stebila &amp; Mosca, Open Quantum Safe (SAC 2016); kyber-py, dilithium-py</a:t>
+                      </a:r>
+                    </a:p>
+                  </a:txBody>
+                  <a:tcPr marL="64008" marR="64008" marT="27432" marB="27432">
+                    <a:solidFill>
+                      <a:srgbClr val="CCD7EA"/>
+                    </a:solidFill>
+                  </a:tcPr>
+                </a:tc>
+                <a:tc>
+                  <a:txBody>
+                    <a:bodyPr wrap="square"/>
+                    <a:lstStyle/>
+                    <a:p>
+                      <a:pPr>
+                        <a:lnSpc>
+                          <a:spcPct val="92000"/>
+                        </a:lnSpc>
+                      </a:pPr>
+                      <a:r>
+                        <a:rPr sz="950" b="0">
+                          <a:solidFill>
+                            <a:srgbClr val="1A1A1A"/>
+                          </a:solidFill>
+                        </a:rPr>
+                        <a:t>Make post-quantum primitives usable in real software</a:t>
+                      </a:r>
+                    </a:p>
+                  </a:txBody>
+                  <a:tcPr marL="64008" marR="64008" marT="27432" marB="27432">
+                    <a:solidFill>
+                      <a:srgbClr val="CCD7EA"/>
+                    </a:solidFill>
+                  </a:tcPr>
+                </a:tc>
+                <a:tc>
+                  <a:txBody>
+                    <a:bodyPr wrap="square"/>
+                    <a:lstStyle/>
+                    <a:p>
+                      <a:pPr>
+                        <a:lnSpc>
+                          <a:spcPct val="92000"/>
+                        </a:lnSpc>
+                      </a:pPr>
+                      <a:r>
+                        <a:rPr sz="950" b="0">
+                          <a:solidFill>
+                            <a:srgbClr val="1A1A1A"/>
+                          </a:solidFill>
+                        </a:rPr>
+                        <a:t>Open-source reference and optimised implementations</a:t>
+                      </a:r>
+                    </a:p>
+                  </a:txBody>
+                  <a:tcPr marL="64008" marR="64008" marT="27432" marB="27432">
+                    <a:solidFill>
+                      <a:srgbClr val="CCD7EA"/>
+                    </a:solidFill>
+                  </a:tcPr>
+                </a:tc>
+                <a:tc>
+                  <a:txBody>
+                    <a:bodyPr wrap="square"/>
+                    <a:lstStyle/>
+                    <a:p>
+                      <a:pPr>
+                        <a:lnSpc>
+                          <a:spcPct val="92000"/>
+                        </a:lnSpc>
+                      </a:pPr>
+                      <a:r>
+                        <a:rPr sz="950" b="0">
+                          <a:solidFill>
+                            <a:srgbClr val="1A1A1A"/>
+                          </a:solidFill>
+                        </a:rPr>
+                        <a:t>Pro: production-quality primitives available.</a:t>
+                      </a:r>
+                    </a:p>
+                    <a:p>
+                      <a:pPr>
+                        <a:lnSpc>
+                          <a:spcPct val="92000"/>
+                        </a:lnSpc>
+                      </a:pPr>
+                      <a:r>
+                        <a:rPr sz="950" b="0">
+                          <a:solidFill>
+                            <a:srgbClr val="1A1A1A"/>
+                          </a:solidFill>
+                        </a:rPr>
+                        <a:t>Con: supplies the destination, not the journey</a:t>
+                      </a:r>
+                    </a:p>
+                  </a:txBody>
+                  <a:tcPr marL="64008" marR="64008" marT="27432" marB="27432">
+                    <a:solidFill>
+                      <a:srgbClr val="CCD7EA"/>
+                    </a:solidFill>
+                  </a:tcPr>
+                </a:tc>
+                <a:tc>
+                  <a:txBody>
+                    <a:bodyPr wrap="square"/>
+                    <a:lstStyle/>
+                    <a:p>
+                      <a:pPr>
+                        <a:lnSpc>
+                          <a:spcPct val="92000"/>
+                        </a:lnSpc>
+                      </a:pPr>
+                      <a:r>
+                        <a:rPr sz="950" b="0">
+                          <a:solidFill>
+                            <a:srgbClr val="1A1A1A"/>
+                          </a:solidFill>
+                        </a:rPr>
+                        <a:t>Primitives are available and interoperable well ahead of adoption</a:t>
+                      </a:r>
+                    </a:p>
+                  </a:txBody>
+                  <a:tcPr marL="64008" marR="64008" marT="27432" marB="27432">
+                    <a:solidFill>
+                      <a:srgbClr val="CCD7EA"/>
+                    </a:solidFill>
+                  </a:tcPr>
+                </a:tc>
+              </a:tr>
+              <a:tr h="792480">
+                <a:tc>
+                  <a:txBody>
+                    <a:bodyPr wrap="square"/>
+                    <a:lstStyle/>
+                    <a:p>
+                      <a:pPr>
+                        <a:lnSpc>
+                          <a:spcPct val="92000"/>
+                        </a:lnSpc>
+                      </a:pPr>
+                      <a:r>
+                        <a:rPr sz="950" b="0">
+                          <a:solidFill>
+                            <a:srgbClr val="1A1A1A"/>
+                          </a:solidFill>
+                        </a:rPr>
+                        <a:t>Chen et al., Evaluating LLMs trained on code (2021)</a:t>
+                      </a:r>
+                    </a:p>
+                  </a:txBody>
+                  <a:tcPr marL="64008" marR="64008" marT="27432" marB="27432">
+                    <a:solidFill>
+                      <a:srgbClr val="DEE6F2"/>
+                    </a:solidFill>
+                  </a:tcPr>
+                </a:tc>
+                <a:tc>
+                  <a:txBody>
+                    <a:bodyPr wrap="square"/>
+                    <a:lstStyle/>
+                    <a:p>
+                      <a:pPr>
+                        <a:lnSpc>
+                          <a:spcPct val="92000"/>
+                        </a:lnSpc>
+                      </a:pPr>
+                      <a:r>
+                        <a:rPr sz="950" b="0">
+                          <a:solidFill>
+                            <a:srgbClr val="1A1A1A"/>
+                          </a:solidFill>
+                        </a:rPr>
+                        <a:t>Assess model-driven source-to-source transformation</a:t>
+                      </a:r>
+                    </a:p>
+                  </a:txBody>
+                  <a:tcPr marL="64008" marR="64008" marT="27432" marB="27432">
+                    <a:solidFill>
+                      <a:srgbClr val="DEE6F2"/>
+                    </a:solidFill>
+                  </a:tcPr>
+                </a:tc>
+                <a:tc>
+                  <a:txBody>
+                    <a:bodyPr wrap="square"/>
+                    <a:lstStyle/>
+                    <a:p>
+                      <a:pPr>
+                        <a:lnSpc>
+                          <a:spcPct val="92000"/>
+                        </a:lnSpc>
+                      </a:pPr>
+                      <a:r>
+                        <a:rPr sz="950" b="0">
+                          <a:solidFill>
+                            <a:srgbClr val="1A1A1A"/>
+                          </a:solidFill>
+                        </a:rPr>
+                        <a:t>Benchmark generated code against functional tests</a:t>
+                      </a:r>
+                    </a:p>
+                  </a:txBody>
+                  <a:tcPr marL="64008" marR="64008" marT="27432" marB="27432">
+                    <a:solidFill>
+                      <a:srgbClr val="DEE6F2"/>
+                    </a:solidFill>
+                  </a:tcPr>
+                </a:tc>
+                <a:tc>
+                  <a:txBody>
+                    <a:bodyPr wrap="square"/>
+                    <a:lstStyle/>
+                    <a:p>
+                      <a:pPr>
+                        <a:lnSpc>
+                          <a:spcPct val="92000"/>
+                        </a:lnSpc>
+                      </a:pPr>
+                      <a:r>
+                        <a:rPr sz="950" b="0">
+                          <a:solidFill>
+                            <a:srgbClr val="1A1A1A"/>
+                          </a:solidFill>
+                        </a:rPr>
+                        <a:t>Pro: handles code shapes rules cannot match.</a:t>
+                      </a:r>
+                    </a:p>
+                    <a:p>
+                      <a:pPr>
+                        <a:lnSpc>
+                          <a:spcPct val="92000"/>
+                        </a:lnSpc>
+                      </a:pPr>
+                      <a:r>
+                        <a:rPr sz="950" b="0">
+                          <a:solidFill>
+                            <a:srgbClr val="1A1A1A"/>
+                          </a:solidFill>
+                        </a:rPr>
+                        <a:t>Con: output requires human verification</a:t>
+                      </a:r>
+                    </a:p>
+                  </a:txBody>
+                  <a:tcPr marL="64008" marR="64008" marT="27432" marB="27432">
+                    <a:solidFill>
+                      <a:srgbClr val="DEE6F2"/>
+                    </a:solidFill>
+                  </a:tcPr>
+                </a:tc>
+                <a:tc>
+                  <a:txBody>
+                    <a:bodyPr wrap="square"/>
+                    <a:lstStyle/>
+                    <a:p>
+                      <a:pPr>
+                        <a:lnSpc>
+                          <a:spcPct val="92000"/>
+                        </a:lnSpc>
+                      </a:pPr>
+                      <a:r>
+                        <a:rPr sz="950" b="0">
+                          <a:solidFill>
+                            <a:srgbClr val="1A1A1A"/>
+                          </a:solidFill>
+                        </a:rPr>
+                        <a:t>A plausible patch is indistinguishable from a correct one without execution</a:t>
+                      </a:r>
+                    </a:p>
+                  </a:txBody>
+                  <a:tcPr marL="64008" marR="64008" marT="27432" marB="27432">
+                    <a:solidFill>
+                      <a:srgbClr val="DEE6F2"/>
+                    </a:solidFill>
+                  </a:tcPr>
+                </a:tc>
+              </a:tr>
+              <a:tr h="792480">
+                <a:tc>
+                  <a:txBody>
+                    <a:bodyPr wrap="square"/>
+                    <a:lstStyle/>
+                    <a:p>
+                      <a:pPr>
+                        <a:lnSpc>
+                          <a:spcPct val="92000"/>
+                        </a:lnSpc>
+                      </a:pPr>
+                      <a:r>
+                        <a:rPr sz="950" b="0">
+                          <a:solidFill>
+                            <a:srgbClr val="1A1A1A"/>
+                          </a:solidFill>
+                        </a:rPr>
+                        <a:t>Mosca (2018); Barker et al., NIST white paper (2021)</a:t>
+                      </a:r>
+                    </a:p>
+                  </a:txBody>
+                  <a:tcPr marL="64008" marR="64008" marT="27432" marB="27432">
+                    <a:solidFill>
+                      <a:srgbClr val="CCD7EA"/>
+                    </a:solidFill>
+                  </a:tcPr>
+                </a:tc>
+                <a:tc>
+                  <a:txBody>
+                    <a:bodyPr wrap="square"/>
+                    <a:lstStyle/>
+                    <a:p>
+                      <a:pPr>
+                        <a:lnSpc>
+                          <a:spcPct val="92000"/>
+                        </a:lnSpc>
+                      </a:pPr>
+                      <a:r>
+                        <a:rPr sz="950" b="0">
+                          <a:solidFill>
+                            <a:srgbClr val="1A1A1A"/>
+                          </a:solidFill>
+                        </a:rPr>
+                        <a:t>Frame the urgency and organisational readiness problem</a:t>
+                      </a:r>
+                    </a:p>
+                  </a:txBody>
+                  <a:tcPr marL="64008" marR="64008" marT="27432" marB="27432">
+                    <a:solidFill>
+                      <a:srgbClr val="CCD7EA"/>
+                    </a:solidFill>
+                  </a:tcPr>
+                </a:tc>
+                <a:tc>
+                  <a:txBody>
+                    <a:bodyPr wrap="square"/>
+                    <a:lstStyle/>
+                    <a:p>
+                      <a:pPr>
+                        <a:lnSpc>
+                          <a:spcPct val="92000"/>
+                        </a:lnSpc>
+                      </a:pPr>
+                      <a:r>
+                        <a:rPr sz="950" b="0">
+                          <a:solidFill>
+                            <a:srgbClr val="1A1A1A"/>
+                          </a:solidFill>
+                        </a:rPr>
+                        <a:t>Risk analysis of the harvest-now-decrypt-later threat</a:t>
+                      </a:r>
+                    </a:p>
+                  </a:txBody>
+                  <a:tcPr marL="64008" marR="64008" marT="27432" marB="27432">
+                    <a:solidFill>
+                      <a:srgbClr val="CCD7EA"/>
+                    </a:solidFill>
+                  </a:tcPr>
+                </a:tc>
+                <a:tc>
+                  <a:txBody>
+                    <a:bodyPr wrap="square"/>
+                    <a:lstStyle/>
+                    <a:p>
+                      <a:pPr>
+                        <a:lnSpc>
+                          <a:spcPct val="92000"/>
+                        </a:lnSpc>
+                      </a:pPr>
+                      <a:r>
+                        <a:rPr sz="950" b="0">
+                          <a:solidFill>
+                            <a:srgbClr val="1A1A1A"/>
+                          </a:solidFill>
+                        </a:rPr>
+                        <a:t>Pro: justifies acting before quantum hardware exists.</a:t>
+                      </a:r>
+                    </a:p>
+                    <a:p>
+                      <a:pPr>
+                        <a:lnSpc>
+                          <a:spcPct val="92000"/>
+                        </a:lnSpc>
+                      </a:pPr>
+                      <a:r>
+                        <a:rPr sz="950" b="0">
+                          <a:solidFill>
+                            <a:srgbClr val="1A1A1A"/>
+                          </a:solidFill>
+                        </a:rPr>
+                        <a:t>Con: no technical migration path</a:t>
+                      </a:r>
+                    </a:p>
+                  </a:txBody>
+                  <a:tcPr marL="64008" marR="64008" marT="27432" marB="27432">
+                    <a:solidFill>
+                      <a:srgbClr val="CCD7EA"/>
+                    </a:solidFill>
+                  </a:tcPr>
+                </a:tc>
+                <a:tc>
+                  <a:txBody>
+                    <a:bodyPr wrap="square"/>
+                    <a:lstStyle/>
+                    <a:p>
+                      <a:pPr>
+                        <a:lnSpc>
+                          <a:spcPct val="92000"/>
+                        </a:lnSpc>
+                      </a:pPr>
+                      <a:r>
+                        <a:rPr sz="950" b="0">
+                          <a:solidFill>
+                            <a:srgbClr val="1A1A1A"/>
+                          </a:solidFill>
+                        </a:rPr>
+                        <a:t>Long-lived data is already exposed; migration cannot wait for the threat</a:t>
+                      </a:r>
+                    </a:p>
+                  </a:txBody>
+                  <a:tcPr marL="64008" marR="64008" marT="27432" marB="27432">
+                    <a:solidFill>
+                      <a:srgbClr val="CCD7EA"/>
+                    </a:solidFill>
+                  </a:tcPr>
+                </a:tc>
+              </a:tr>
+            </a:tbl>
+          </a:graphicData>
+        </a:graphic>
+      </p:graphicFrame>
     </p:spTree>
     <p:extLst>
       <p:ext uri="{BB962C8B-B14F-4D97-AF65-F5344CB8AC3E}">

--- a/report/Review_3_Team_20106UG02.pptx
+++ b/report/Review_3_Team_20106UG02.pptx
@@ -122,7 +122,18 @@
   </p:defaultTextStyle>
   <p:extLst>
     <p:ext uri="{EFAFB233-063F-42B5-8137-9DF3F51BA10A}">
-      <p15:sldGuideLst xmlns:p15="http://schemas.microsoft.com/office/powerpoint/2012/main" xmlns=""/>
+      <p15:sldGuideLst xmlns:p15="http://schemas.microsoft.com/office/powerpoint/2012/main">
+        <p15:guide id="1" orient="horz" pos="2160">
+          <p15:clr>
+            <a:srgbClr val="A4A3A4"/>
+          </p15:clr>
+        </p15:guide>
+        <p15:guide id="2" pos="3840">
+          <p15:clr>
+            <a:srgbClr val="A4A3A4"/>
+          </p15:clr>
+        </p15:guide>
+      </p15:sldGuideLst>
     </p:ext>
   </p:extLst>
 </p:presentation>
@@ -210,7 +221,7 @@
           <a:p>
             <a:fld id="{C058E2E1-8886-43B2-B986-F2B06DAA2FAC}" type="datetimeFigureOut">
               <a:rPr lang="en-IN" smtClean="0"/>
-              <a:t>05/10/26</a:t>
+              <a:t>25-10-2026</a:t>
             </a:fld>
             <a:endParaRPr lang="en-IN"/>
           </a:p>
@@ -500,7 +511,7 @@
           <p:cNvPr id="2" name="Title 1">
             <a:extLst>
               <a:ext uri="{FF2B5EF4-FFF2-40B4-BE49-F238E27FC236}">
-                <a16:creationId xmlns:a16="http://schemas.microsoft.com/office/drawing/2014/main" xmlns="" id="{342592BF-19BE-9BF0-E2FC-07A36D054E1D}"/>
+                <a16:creationId xmlns:a16="http://schemas.microsoft.com/office/drawing/2014/main" id="{342592BF-19BE-9BF0-E2FC-07A36D054E1D}"/>
               </a:ext>
             </a:extLst>
           </p:cNvPr>
@@ -538,7 +549,7 @@
           <p:cNvPr id="3" name="Subtitle 2">
             <a:extLst>
               <a:ext uri="{FF2B5EF4-FFF2-40B4-BE49-F238E27FC236}">
-                <a16:creationId xmlns:a16="http://schemas.microsoft.com/office/drawing/2014/main" xmlns="" id="{383AB4F9-CBB3-B18D-E917-C3B06418676D}"/>
+                <a16:creationId xmlns:a16="http://schemas.microsoft.com/office/drawing/2014/main" id="{383AB4F9-CBB3-B18D-E917-C3B06418676D}"/>
               </a:ext>
             </a:extLst>
           </p:cNvPr>
@@ -609,7 +620,7 @@
           <p:cNvPr id="4" name="Date Placeholder 3">
             <a:extLst>
               <a:ext uri="{FF2B5EF4-FFF2-40B4-BE49-F238E27FC236}">
-                <a16:creationId xmlns:a16="http://schemas.microsoft.com/office/drawing/2014/main" xmlns="" id="{F50F18A0-E201-1900-A139-E830DD3EA1D1}"/>
+                <a16:creationId xmlns:a16="http://schemas.microsoft.com/office/drawing/2014/main" id="{F50F18A0-E201-1900-A139-E830DD3EA1D1}"/>
               </a:ext>
             </a:extLst>
           </p:cNvPr>
@@ -627,7 +638,7 @@
           <a:p>
             <a:fld id="{8F3E78AE-7F97-4550-9DD8-BF69171FDC30}" type="datetime1">
               <a:rPr lang="en-IN" smtClean="0"/>
-              <a:t>05/10/26</a:t>
+              <a:t>25-10-2026</a:t>
             </a:fld>
             <a:endParaRPr lang="en-IN"/>
           </a:p>
@@ -638,7 +649,7 @@
           <p:cNvPr id="5" name="Footer Placeholder 4">
             <a:extLst>
               <a:ext uri="{FF2B5EF4-FFF2-40B4-BE49-F238E27FC236}">
-                <a16:creationId xmlns:a16="http://schemas.microsoft.com/office/drawing/2014/main" xmlns="" id="{ED0906B9-B1F6-B52E-2EE0-7595B1EBF0FF}"/>
+                <a16:creationId xmlns:a16="http://schemas.microsoft.com/office/drawing/2014/main" id="{ED0906B9-B1F6-B52E-2EE0-7595B1EBF0FF}"/>
               </a:ext>
             </a:extLst>
           </p:cNvPr>
@@ -666,7 +677,7 @@
           <p:cNvPr id="6" name="Slide Number Placeholder 5">
             <a:extLst>
               <a:ext uri="{FF2B5EF4-FFF2-40B4-BE49-F238E27FC236}">
-                <a16:creationId xmlns:a16="http://schemas.microsoft.com/office/drawing/2014/main" xmlns="" id="{97A13AE1-F96E-D540-8DE1-8D903DB30CE2}"/>
+                <a16:creationId xmlns:a16="http://schemas.microsoft.com/office/drawing/2014/main" id="{97A13AE1-F96E-D540-8DE1-8D903DB30CE2}"/>
               </a:ext>
             </a:extLst>
           </p:cNvPr>
@@ -725,7 +736,7 @@
           <p:cNvPr id="2" name="Title 1">
             <a:extLst>
               <a:ext uri="{FF2B5EF4-FFF2-40B4-BE49-F238E27FC236}">
-                <a16:creationId xmlns:a16="http://schemas.microsoft.com/office/drawing/2014/main" xmlns="" id="{7E71D7EC-16EA-5009-5D33-ABFC55F28132}"/>
+                <a16:creationId xmlns:a16="http://schemas.microsoft.com/office/drawing/2014/main" id="{7E71D7EC-16EA-5009-5D33-ABFC55F28132}"/>
               </a:ext>
             </a:extLst>
           </p:cNvPr>
@@ -754,7 +765,7 @@
           <p:cNvPr id="3" name="Vertical Text Placeholder 2">
             <a:extLst>
               <a:ext uri="{FF2B5EF4-FFF2-40B4-BE49-F238E27FC236}">
-                <a16:creationId xmlns:a16="http://schemas.microsoft.com/office/drawing/2014/main" xmlns="" id="{EB09EC6D-8ED5-29E9-9444-CC2D6A1CB8A3}"/>
+                <a16:creationId xmlns:a16="http://schemas.microsoft.com/office/drawing/2014/main" id="{EB09EC6D-8ED5-29E9-9444-CC2D6A1CB8A3}"/>
               </a:ext>
             </a:extLst>
           </p:cNvPr>
@@ -812,7 +823,7 @@
           <p:cNvPr id="4" name="Date Placeholder 3">
             <a:extLst>
               <a:ext uri="{FF2B5EF4-FFF2-40B4-BE49-F238E27FC236}">
-                <a16:creationId xmlns:a16="http://schemas.microsoft.com/office/drawing/2014/main" xmlns="" id="{3C1ADFC6-7CEA-ABEE-94C2-870B1E65737A}"/>
+                <a16:creationId xmlns:a16="http://schemas.microsoft.com/office/drawing/2014/main" id="{3C1ADFC6-7CEA-ABEE-94C2-870B1E65737A}"/>
               </a:ext>
             </a:extLst>
           </p:cNvPr>
@@ -830,7 +841,7 @@
           <a:p>
             <a:fld id="{5576931C-EA1A-43DD-B3B3-66F5BA587712}" type="datetime1">
               <a:rPr lang="en-IN" smtClean="0"/>
-              <a:t>05/10/26</a:t>
+              <a:t>25-10-2026</a:t>
             </a:fld>
             <a:endParaRPr lang="en-IN"/>
           </a:p>
@@ -841,7 +852,7 @@
           <p:cNvPr id="5" name="Footer Placeholder 4">
             <a:extLst>
               <a:ext uri="{FF2B5EF4-FFF2-40B4-BE49-F238E27FC236}">
-                <a16:creationId xmlns:a16="http://schemas.microsoft.com/office/drawing/2014/main" xmlns="" id="{7B1FA3A5-596E-6C2A-F853-30C5DC6FBF0D}"/>
+                <a16:creationId xmlns:a16="http://schemas.microsoft.com/office/drawing/2014/main" id="{7B1FA3A5-596E-6C2A-F853-30C5DC6FBF0D}"/>
               </a:ext>
             </a:extLst>
           </p:cNvPr>
@@ -869,7 +880,7 @@
           <p:cNvPr id="6" name="Slide Number Placeholder 5">
             <a:extLst>
               <a:ext uri="{FF2B5EF4-FFF2-40B4-BE49-F238E27FC236}">
-                <a16:creationId xmlns:a16="http://schemas.microsoft.com/office/drawing/2014/main" xmlns="" id="{312CE6B1-CE87-B68F-9494-FA6D109F3896}"/>
+                <a16:creationId xmlns:a16="http://schemas.microsoft.com/office/drawing/2014/main" id="{312CE6B1-CE87-B68F-9494-FA6D109F3896}"/>
               </a:ext>
             </a:extLst>
           </p:cNvPr>
@@ -928,7 +939,7 @@
           <p:cNvPr id="2" name="Vertical Title 1">
             <a:extLst>
               <a:ext uri="{FF2B5EF4-FFF2-40B4-BE49-F238E27FC236}">
-                <a16:creationId xmlns:a16="http://schemas.microsoft.com/office/drawing/2014/main" xmlns="" id="{AF0FF105-FC99-2BCB-131F-2B902F8BAE21}"/>
+                <a16:creationId xmlns:a16="http://schemas.microsoft.com/office/drawing/2014/main" id="{AF0FF105-FC99-2BCB-131F-2B902F8BAE21}"/>
               </a:ext>
             </a:extLst>
           </p:cNvPr>
@@ -962,7 +973,7 @@
           <p:cNvPr id="3" name="Vertical Text Placeholder 2">
             <a:extLst>
               <a:ext uri="{FF2B5EF4-FFF2-40B4-BE49-F238E27FC236}">
-                <a16:creationId xmlns:a16="http://schemas.microsoft.com/office/drawing/2014/main" xmlns="" id="{50354FD6-064F-6E12-E8DE-81EC913CDB0B}"/>
+                <a16:creationId xmlns:a16="http://schemas.microsoft.com/office/drawing/2014/main" id="{50354FD6-064F-6E12-E8DE-81EC913CDB0B}"/>
               </a:ext>
             </a:extLst>
           </p:cNvPr>
@@ -1025,7 +1036,7 @@
           <p:cNvPr id="4" name="Date Placeholder 3">
             <a:extLst>
               <a:ext uri="{FF2B5EF4-FFF2-40B4-BE49-F238E27FC236}">
-                <a16:creationId xmlns:a16="http://schemas.microsoft.com/office/drawing/2014/main" xmlns="" id="{EF1D2109-32D1-4A0F-F903-5142A204EF48}"/>
+                <a16:creationId xmlns:a16="http://schemas.microsoft.com/office/drawing/2014/main" id="{EF1D2109-32D1-4A0F-F903-5142A204EF48}"/>
               </a:ext>
             </a:extLst>
           </p:cNvPr>
@@ -1043,7 +1054,7 @@
           <a:p>
             <a:fld id="{82C9B0E1-7C95-4C20-B9C6-BA51F388E878}" type="datetime1">
               <a:rPr lang="en-IN" smtClean="0"/>
-              <a:t>05/10/26</a:t>
+              <a:t>25-10-2026</a:t>
             </a:fld>
             <a:endParaRPr lang="en-IN"/>
           </a:p>
@@ -1054,7 +1065,7 @@
           <p:cNvPr id="5" name="Footer Placeholder 4">
             <a:extLst>
               <a:ext uri="{FF2B5EF4-FFF2-40B4-BE49-F238E27FC236}">
-                <a16:creationId xmlns:a16="http://schemas.microsoft.com/office/drawing/2014/main" xmlns="" id="{73E5353D-EEF9-CF3C-A97F-F0F0EBFA7C59}"/>
+                <a16:creationId xmlns:a16="http://schemas.microsoft.com/office/drawing/2014/main" id="{73E5353D-EEF9-CF3C-A97F-F0F0EBFA7C59}"/>
               </a:ext>
             </a:extLst>
           </p:cNvPr>
@@ -1082,7 +1093,7 @@
           <p:cNvPr id="6" name="Slide Number Placeholder 5">
             <a:extLst>
               <a:ext uri="{FF2B5EF4-FFF2-40B4-BE49-F238E27FC236}">
-                <a16:creationId xmlns:a16="http://schemas.microsoft.com/office/drawing/2014/main" xmlns="" id="{3DF2F1DC-3958-BCDE-9A16-88E928E7ED2D}"/>
+                <a16:creationId xmlns:a16="http://schemas.microsoft.com/office/drawing/2014/main" id="{3DF2F1DC-3958-BCDE-9A16-88E928E7ED2D}"/>
               </a:ext>
             </a:extLst>
           </p:cNvPr>
@@ -1141,7 +1152,7 @@
           <p:cNvPr id="2" name="Title 1">
             <a:extLst>
               <a:ext uri="{FF2B5EF4-FFF2-40B4-BE49-F238E27FC236}">
-                <a16:creationId xmlns:a16="http://schemas.microsoft.com/office/drawing/2014/main" xmlns="" id="{7532F7EA-3EC9-99AF-13A9-22A3F8B2D21C}"/>
+                <a16:creationId xmlns:a16="http://schemas.microsoft.com/office/drawing/2014/main" id="{7532F7EA-3EC9-99AF-13A9-22A3F8B2D21C}"/>
               </a:ext>
             </a:extLst>
           </p:cNvPr>
@@ -1170,7 +1181,7 @@
           <p:cNvPr id="3" name="Content Placeholder 2">
             <a:extLst>
               <a:ext uri="{FF2B5EF4-FFF2-40B4-BE49-F238E27FC236}">
-                <a16:creationId xmlns:a16="http://schemas.microsoft.com/office/drawing/2014/main" xmlns="" id="{FC71419B-73DB-15DA-D2EE-0FC01B435F2F}"/>
+                <a16:creationId xmlns:a16="http://schemas.microsoft.com/office/drawing/2014/main" id="{FC71419B-73DB-15DA-D2EE-0FC01B435F2F}"/>
               </a:ext>
             </a:extLst>
           </p:cNvPr>
@@ -1228,7 +1239,7 @@
           <p:cNvPr id="4" name="Date Placeholder 3">
             <a:extLst>
               <a:ext uri="{FF2B5EF4-FFF2-40B4-BE49-F238E27FC236}">
-                <a16:creationId xmlns:a16="http://schemas.microsoft.com/office/drawing/2014/main" xmlns="" id="{AB080259-8D20-E29B-4DC5-312C3DB01BB3}"/>
+                <a16:creationId xmlns:a16="http://schemas.microsoft.com/office/drawing/2014/main" id="{AB080259-8D20-E29B-4DC5-312C3DB01BB3}"/>
               </a:ext>
             </a:extLst>
           </p:cNvPr>
@@ -1246,7 +1257,7 @@
           <a:p>
             <a:fld id="{FEA886FF-1BA7-4533-94E6-869CE1E2970B}" type="datetime1">
               <a:rPr lang="en-IN" smtClean="0"/>
-              <a:t>05/10/26</a:t>
+              <a:t>25-10-2026</a:t>
             </a:fld>
             <a:endParaRPr lang="en-IN"/>
           </a:p>
@@ -1257,7 +1268,7 @@
           <p:cNvPr id="5" name="Footer Placeholder 4">
             <a:extLst>
               <a:ext uri="{FF2B5EF4-FFF2-40B4-BE49-F238E27FC236}">
-                <a16:creationId xmlns:a16="http://schemas.microsoft.com/office/drawing/2014/main" xmlns="" id="{E101830E-3502-194A-88FA-DC3E0F1B309A}"/>
+                <a16:creationId xmlns:a16="http://schemas.microsoft.com/office/drawing/2014/main" id="{E101830E-3502-194A-88FA-DC3E0F1B309A}"/>
               </a:ext>
             </a:extLst>
           </p:cNvPr>
@@ -1285,7 +1296,7 @@
           <p:cNvPr id="6" name="Slide Number Placeholder 5">
             <a:extLst>
               <a:ext uri="{FF2B5EF4-FFF2-40B4-BE49-F238E27FC236}">
-                <a16:creationId xmlns:a16="http://schemas.microsoft.com/office/drawing/2014/main" xmlns="" id="{ECF6703C-229C-43C6-0484-38EC263AD4A9}"/>
+                <a16:creationId xmlns:a16="http://schemas.microsoft.com/office/drawing/2014/main" id="{ECF6703C-229C-43C6-0484-38EC263AD4A9}"/>
               </a:ext>
             </a:extLst>
           </p:cNvPr>
@@ -1344,7 +1355,7 @@
           <p:cNvPr id="2" name="Title 1">
             <a:extLst>
               <a:ext uri="{FF2B5EF4-FFF2-40B4-BE49-F238E27FC236}">
-                <a16:creationId xmlns:a16="http://schemas.microsoft.com/office/drawing/2014/main" xmlns="" id="{7E0CE344-6494-09A6-A5E4-811EEE0CD2A0}"/>
+                <a16:creationId xmlns:a16="http://schemas.microsoft.com/office/drawing/2014/main" id="{7E0CE344-6494-09A6-A5E4-811EEE0CD2A0}"/>
               </a:ext>
             </a:extLst>
           </p:cNvPr>
@@ -1382,7 +1393,7 @@
           <p:cNvPr id="3" name="Text Placeholder 2">
             <a:extLst>
               <a:ext uri="{FF2B5EF4-FFF2-40B4-BE49-F238E27FC236}">
-                <a16:creationId xmlns:a16="http://schemas.microsoft.com/office/drawing/2014/main" xmlns="" id="{7351A0E2-2B9B-B96E-A3FD-0B26BDDBEB4D}"/>
+                <a16:creationId xmlns:a16="http://schemas.microsoft.com/office/drawing/2014/main" id="{7351A0E2-2B9B-B96E-A3FD-0B26BDDBEB4D}"/>
               </a:ext>
             </a:extLst>
           </p:cNvPr>
@@ -1507,7 +1518,7 @@
           <p:cNvPr id="4" name="Date Placeholder 3">
             <a:extLst>
               <a:ext uri="{FF2B5EF4-FFF2-40B4-BE49-F238E27FC236}">
-                <a16:creationId xmlns:a16="http://schemas.microsoft.com/office/drawing/2014/main" xmlns="" id="{A767CE67-8E8A-4D0D-42DF-DDC842B1B17A}"/>
+                <a16:creationId xmlns:a16="http://schemas.microsoft.com/office/drawing/2014/main" id="{A767CE67-8E8A-4D0D-42DF-DDC842B1B17A}"/>
               </a:ext>
             </a:extLst>
           </p:cNvPr>
@@ -1525,7 +1536,7 @@
           <a:p>
             <a:fld id="{93E22BD8-A2C4-424B-809A-C64DDCC305D9}" type="datetime1">
               <a:rPr lang="en-IN" smtClean="0"/>
-              <a:t>05/10/26</a:t>
+              <a:t>25-10-2026</a:t>
             </a:fld>
             <a:endParaRPr lang="en-IN"/>
           </a:p>
@@ -1536,7 +1547,7 @@
           <p:cNvPr id="5" name="Footer Placeholder 4">
             <a:extLst>
               <a:ext uri="{FF2B5EF4-FFF2-40B4-BE49-F238E27FC236}">
-                <a16:creationId xmlns:a16="http://schemas.microsoft.com/office/drawing/2014/main" xmlns="" id="{73A78C3E-C139-1FD1-979B-D71679959D2B}"/>
+                <a16:creationId xmlns:a16="http://schemas.microsoft.com/office/drawing/2014/main" id="{73A78C3E-C139-1FD1-979B-D71679959D2B}"/>
               </a:ext>
             </a:extLst>
           </p:cNvPr>
@@ -1564,7 +1575,7 @@
           <p:cNvPr id="6" name="Slide Number Placeholder 5">
             <a:extLst>
               <a:ext uri="{FF2B5EF4-FFF2-40B4-BE49-F238E27FC236}">
-                <a16:creationId xmlns:a16="http://schemas.microsoft.com/office/drawing/2014/main" xmlns="" id="{9932F297-889B-B694-6DD5-92F8A6AAFF71}"/>
+                <a16:creationId xmlns:a16="http://schemas.microsoft.com/office/drawing/2014/main" id="{9932F297-889B-B694-6DD5-92F8A6AAFF71}"/>
               </a:ext>
             </a:extLst>
           </p:cNvPr>
@@ -1623,7 +1634,7 @@
           <p:cNvPr id="2" name="Title 1">
             <a:extLst>
               <a:ext uri="{FF2B5EF4-FFF2-40B4-BE49-F238E27FC236}">
-                <a16:creationId xmlns:a16="http://schemas.microsoft.com/office/drawing/2014/main" xmlns="" id="{0792C89C-FEA2-11F6-7988-ADD14A7B22F9}"/>
+                <a16:creationId xmlns:a16="http://schemas.microsoft.com/office/drawing/2014/main" id="{0792C89C-FEA2-11F6-7988-ADD14A7B22F9}"/>
               </a:ext>
             </a:extLst>
           </p:cNvPr>
@@ -1652,7 +1663,7 @@
           <p:cNvPr id="3" name="Content Placeholder 2">
             <a:extLst>
               <a:ext uri="{FF2B5EF4-FFF2-40B4-BE49-F238E27FC236}">
-                <a16:creationId xmlns:a16="http://schemas.microsoft.com/office/drawing/2014/main" xmlns="" id="{60E5DE7B-A406-1142-36EA-1C1498740235}"/>
+                <a16:creationId xmlns:a16="http://schemas.microsoft.com/office/drawing/2014/main" id="{60E5DE7B-A406-1142-36EA-1C1498740235}"/>
               </a:ext>
             </a:extLst>
           </p:cNvPr>
@@ -1715,7 +1726,7 @@
           <p:cNvPr id="4" name="Content Placeholder 3">
             <a:extLst>
               <a:ext uri="{FF2B5EF4-FFF2-40B4-BE49-F238E27FC236}">
-                <a16:creationId xmlns:a16="http://schemas.microsoft.com/office/drawing/2014/main" xmlns="" id="{D4355A2B-361E-86CB-ABBE-C510D2B2215F}"/>
+                <a16:creationId xmlns:a16="http://schemas.microsoft.com/office/drawing/2014/main" id="{D4355A2B-361E-86CB-ABBE-C510D2B2215F}"/>
               </a:ext>
             </a:extLst>
           </p:cNvPr>
@@ -1778,7 +1789,7 @@
           <p:cNvPr id="5" name="Date Placeholder 4">
             <a:extLst>
               <a:ext uri="{FF2B5EF4-FFF2-40B4-BE49-F238E27FC236}">
-                <a16:creationId xmlns:a16="http://schemas.microsoft.com/office/drawing/2014/main" xmlns="" id="{50DA5E84-A1E0-A1C4-F7E6-DA9E7B124C77}"/>
+                <a16:creationId xmlns:a16="http://schemas.microsoft.com/office/drawing/2014/main" id="{50DA5E84-A1E0-A1C4-F7E6-DA9E7B124C77}"/>
               </a:ext>
             </a:extLst>
           </p:cNvPr>
@@ -1796,7 +1807,7 @@
           <a:p>
             <a:fld id="{B620F4BC-B3A4-46AF-9AEC-8478EF1369D5}" type="datetime1">
               <a:rPr lang="en-IN" smtClean="0"/>
-              <a:t>05/10/26</a:t>
+              <a:t>25-10-2026</a:t>
             </a:fld>
             <a:endParaRPr lang="en-IN"/>
           </a:p>
@@ -1807,7 +1818,7 @@
           <p:cNvPr id="6" name="Footer Placeholder 5">
             <a:extLst>
               <a:ext uri="{FF2B5EF4-FFF2-40B4-BE49-F238E27FC236}">
-                <a16:creationId xmlns:a16="http://schemas.microsoft.com/office/drawing/2014/main" xmlns="" id="{D5DDA460-54C8-F2AC-C053-53FF3FAFCCD5}"/>
+                <a16:creationId xmlns:a16="http://schemas.microsoft.com/office/drawing/2014/main" id="{D5DDA460-54C8-F2AC-C053-53FF3FAFCCD5}"/>
               </a:ext>
             </a:extLst>
           </p:cNvPr>
@@ -1835,7 +1846,7 @@
           <p:cNvPr id="7" name="Slide Number Placeholder 6">
             <a:extLst>
               <a:ext uri="{FF2B5EF4-FFF2-40B4-BE49-F238E27FC236}">
-                <a16:creationId xmlns:a16="http://schemas.microsoft.com/office/drawing/2014/main" xmlns="" id="{EE6F132A-BD40-58D2-CEEC-A1BA2B9E2EF2}"/>
+                <a16:creationId xmlns:a16="http://schemas.microsoft.com/office/drawing/2014/main" id="{EE6F132A-BD40-58D2-CEEC-A1BA2B9E2EF2}"/>
               </a:ext>
             </a:extLst>
           </p:cNvPr>
@@ -1894,7 +1905,7 @@
           <p:cNvPr id="2" name="Title 1">
             <a:extLst>
               <a:ext uri="{FF2B5EF4-FFF2-40B4-BE49-F238E27FC236}">
-                <a16:creationId xmlns:a16="http://schemas.microsoft.com/office/drawing/2014/main" xmlns="" id="{F05823BE-2514-8722-ED45-41E13E46B674}"/>
+                <a16:creationId xmlns:a16="http://schemas.microsoft.com/office/drawing/2014/main" id="{F05823BE-2514-8722-ED45-41E13E46B674}"/>
               </a:ext>
             </a:extLst>
           </p:cNvPr>
@@ -1928,7 +1939,7 @@
           <p:cNvPr id="3" name="Text Placeholder 2">
             <a:extLst>
               <a:ext uri="{FF2B5EF4-FFF2-40B4-BE49-F238E27FC236}">
-                <a16:creationId xmlns:a16="http://schemas.microsoft.com/office/drawing/2014/main" xmlns="" id="{64BFEE3B-6ABA-1D24-97FE-717EBBC999EA}"/>
+                <a16:creationId xmlns:a16="http://schemas.microsoft.com/office/drawing/2014/main" id="{64BFEE3B-6ABA-1D24-97FE-717EBBC999EA}"/>
               </a:ext>
             </a:extLst>
           </p:cNvPr>
@@ -1999,7 +2010,7 @@
           <p:cNvPr id="4" name="Content Placeholder 3">
             <a:extLst>
               <a:ext uri="{FF2B5EF4-FFF2-40B4-BE49-F238E27FC236}">
-                <a16:creationId xmlns:a16="http://schemas.microsoft.com/office/drawing/2014/main" xmlns="" id="{5C653C42-4C6D-988F-42A0-8639A508A612}"/>
+                <a16:creationId xmlns:a16="http://schemas.microsoft.com/office/drawing/2014/main" id="{5C653C42-4C6D-988F-42A0-8639A508A612}"/>
               </a:ext>
             </a:extLst>
           </p:cNvPr>
@@ -2062,7 +2073,7 @@
           <p:cNvPr id="5" name="Text Placeholder 4">
             <a:extLst>
               <a:ext uri="{FF2B5EF4-FFF2-40B4-BE49-F238E27FC236}">
-                <a16:creationId xmlns:a16="http://schemas.microsoft.com/office/drawing/2014/main" xmlns="" id="{F2B662B4-F942-A78F-394F-74F6037179B2}"/>
+                <a16:creationId xmlns:a16="http://schemas.microsoft.com/office/drawing/2014/main" id="{F2B662B4-F942-A78F-394F-74F6037179B2}"/>
               </a:ext>
             </a:extLst>
           </p:cNvPr>
@@ -2133,7 +2144,7 @@
           <p:cNvPr id="6" name="Content Placeholder 5">
             <a:extLst>
               <a:ext uri="{FF2B5EF4-FFF2-40B4-BE49-F238E27FC236}">
-                <a16:creationId xmlns:a16="http://schemas.microsoft.com/office/drawing/2014/main" xmlns="" id="{5B445FBE-A81E-92E1-36E3-99D1586F8316}"/>
+                <a16:creationId xmlns:a16="http://schemas.microsoft.com/office/drawing/2014/main" id="{5B445FBE-A81E-92E1-36E3-99D1586F8316}"/>
               </a:ext>
             </a:extLst>
           </p:cNvPr>
@@ -2196,7 +2207,7 @@
           <p:cNvPr id="7" name="Date Placeholder 6">
             <a:extLst>
               <a:ext uri="{FF2B5EF4-FFF2-40B4-BE49-F238E27FC236}">
-                <a16:creationId xmlns:a16="http://schemas.microsoft.com/office/drawing/2014/main" xmlns="" id="{B6D20C02-77C2-CB2A-62F8-60B8C62629ED}"/>
+                <a16:creationId xmlns:a16="http://schemas.microsoft.com/office/drawing/2014/main" id="{B6D20C02-77C2-CB2A-62F8-60B8C62629ED}"/>
               </a:ext>
             </a:extLst>
           </p:cNvPr>
@@ -2214,7 +2225,7 @@
           <a:p>
             <a:fld id="{4C9A2993-B405-4F4D-B968-A01C27211659}" type="datetime1">
               <a:rPr lang="en-IN" smtClean="0"/>
-              <a:t>05/10/26</a:t>
+              <a:t>25-10-2026</a:t>
             </a:fld>
             <a:endParaRPr lang="en-IN"/>
           </a:p>
@@ -2225,7 +2236,7 @@
           <p:cNvPr id="8" name="Footer Placeholder 7">
             <a:extLst>
               <a:ext uri="{FF2B5EF4-FFF2-40B4-BE49-F238E27FC236}">
-                <a16:creationId xmlns:a16="http://schemas.microsoft.com/office/drawing/2014/main" xmlns="" id="{AD033241-EB08-777E-F678-5D641F6495A5}"/>
+                <a16:creationId xmlns:a16="http://schemas.microsoft.com/office/drawing/2014/main" id="{AD033241-EB08-777E-F678-5D641F6495A5}"/>
               </a:ext>
             </a:extLst>
           </p:cNvPr>
@@ -2253,7 +2264,7 @@
           <p:cNvPr id="9" name="Slide Number Placeholder 8">
             <a:extLst>
               <a:ext uri="{FF2B5EF4-FFF2-40B4-BE49-F238E27FC236}">
-                <a16:creationId xmlns:a16="http://schemas.microsoft.com/office/drawing/2014/main" xmlns="" id="{40D711ED-181F-C690-A3B3-1D82670FC5D5}"/>
+                <a16:creationId xmlns:a16="http://schemas.microsoft.com/office/drawing/2014/main" id="{40D711ED-181F-C690-A3B3-1D82670FC5D5}"/>
               </a:ext>
             </a:extLst>
           </p:cNvPr>
@@ -2312,7 +2323,7 @@
           <p:cNvPr id="2" name="Title 1">
             <a:extLst>
               <a:ext uri="{FF2B5EF4-FFF2-40B4-BE49-F238E27FC236}">
-                <a16:creationId xmlns:a16="http://schemas.microsoft.com/office/drawing/2014/main" xmlns="" id="{F77468B4-E355-69B3-7598-80ADF2F9CC18}"/>
+                <a16:creationId xmlns:a16="http://schemas.microsoft.com/office/drawing/2014/main" id="{F77468B4-E355-69B3-7598-80ADF2F9CC18}"/>
               </a:ext>
             </a:extLst>
           </p:cNvPr>
@@ -2341,7 +2352,7 @@
           <p:cNvPr id="3" name="Date Placeholder 2">
             <a:extLst>
               <a:ext uri="{FF2B5EF4-FFF2-40B4-BE49-F238E27FC236}">
-                <a16:creationId xmlns:a16="http://schemas.microsoft.com/office/drawing/2014/main" xmlns="" id="{E2F1AB3B-AFC6-3627-62E6-22313061FA80}"/>
+                <a16:creationId xmlns:a16="http://schemas.microsoft.com/office/drawing/2014/main" id="{E2F1AB3B-AFC6-3627-62E6-22313061FA80}"/>
               </a:ext>
             </a:extLst>
           </p:cNvPr>
@@ -2359,7 +2370,7 @@
           <a:p>
             <a:fld id="{79378C8C-5FBB-4DD7-A06D-BE263480794B}" type="datetime1">
               <a:rPr lang="en-IN" smtClean="0"/>
-              <a:t>05/10/26</a:t>
+              <a:t>25-10-2026</a:t>
             </a:fld>
             <a:endParaRPr lang="en-IN"/>
           </a:p>
@@ -2370,7 +2381,7 @@
           <p:cNvPr id="4" name="Footer Placeholder 3">
             <a:extLst>
               <a:ext uri="{FF2B5EF4-FFF2-40B4-BE49-F238E27FC236}">
-                <a16:creationId xmlns:a16="http://schemas.microsoft.com/office/drawing/2014/main" xmlns="" id="{2B2C6591-48E4-480E-7965-DE9F830154A3}"/>
+                <a16:creationId xmlns:a16="http://schemas.microsoft.com/office/drawing/2014/main" id="{2B2C6591-48E4-480E-7965-DE9F830154A3}"/>
               </a:ext>
             </a:extLst>
           </p:cNvPr>
@@ -2398,7 +2409,7 @@
           <p:cNvPr id="5" name="Slide Number Placeholder 4">
             <a:extLst>
               <a:ext uri="{FF2B5EF4-FFF2-40B4-BE49-F238E27FC236}">
-                <a16:creationId xmlns:a16="http://schemas.microsoft.com/office/drawing/2014/main" xmlns="" id="{F10C9D68-A16A-B2D3-C8A6-B5221AF744BC}"/>
+                <a16:creationId xmlns:a16="http://schemas.microsoft.com/office/drawing/2014/main" id="{F10C9D68-A16A-B2D3-C8A6-B5221AF744BC}"/>
               </a:ext>
             </a:extLst>
           </p:cNvPr>
@@ -2457,7 +2468,7 @@
           <p:cNvPr id="2" name="Date Placeholder 1">
             <a:extLst>
               <a:ext uri="{FF2B5EF4-FFF2-40B4-BE49-F238E27FC236}">
-                <a16:creationId xmlns:a16="http://schemas.microsoft.com/office/drawing/2014/main" xmlns="" id="{A23F289A-3AD7-C11D-1594-90A35E592B5C}"/>
+                <a16:creationId xmlns:a16="http://schemas.microsoft.com/office/drawing/2014/main" id="{A23F289A-3AD7-C11D-1594-90A35E592B5C}"/>
               </a:ext>
             </a:extLst>
           </p:cNvPr>
@@ -2475,7 +2486,7 @@
           <a:p>
             <a:fld id="{31FD2985-06EC-459B-80C8-F6F4362A1C03}" type="datetime1">
               <a:rPr lang="en-IN" smtClean="0"/>
-              <a:t>05/10/26</a:t>
+              <a:t>25-10-2026</a:t>
             </a:fld>
             <a:endParaRPr lang="en-IN"/>
           </a:p>
@@ -2486,7 +2497,7 @@
           <p:cNvPr id="3" name="Footer Placeholder 2">
             <a:extLst>
               <a:ext uri="{FF2B5EF4-FFF2-40B4-BE49-F238E27FC236}">
-                <a16:creationId xmlns:a16="http://schemas.microsoft.com/office/drawing/2014/main" xmlns="" id="{8C252269-BBE3-199F-299B-38D4E9CC1899}"/>
+                <a16:creationId xmlns:a16="http://schemas.microsoft.com/office/drawing/2014/main" id="{8C252269-BBE3-199F-299B-38D4E9CC1899}"/>
               </a:ext>
             </a:extLst>
           </p:cNvPr>
@@ -2514,7 +2525,7 @@
           <p:cNvPr id="4" name="Slide Number Placeholder 3">
             <a:extLst>
               <a:ext uri="{FF2B5EF4-FFF2-40B4-BE49-F238E27FC236}">
-                <a16:creationId xmlns:a16="http://schemas.microsoft.com/office/drawing/2014/main" xmlns="" id="{F7407FDC-B2A9-1304-047F-5808A0B6B226}"/>
+                <a16:creationId xmlns:a16="http://schemas.microsoft.com/office/drawing/2014/main" id="{F7407FDC-B2A9-1304-047F-5808A0B6B226}"/>
               </a:ext>
             </a:extLst>
           </p:cNvPr>
@@ -2573,7 +2584,7 @@
           <p:cNvPr id="2" name="Title 1">
             <a:extLst>
               <a:ext uri="{FF2B5EF4-FFF2-40B4-BE49-F238E27FC236}">
-                <a16:creationId xmlns:a16="http://schemas.microsoft.com/office/drawing/2014/main" xmlns="" id="{F25A4847-FC20-D9BF-0BDE-26EC7EF7435D}"/>
+                <a16:creationId xmlns:a16="http://schemas.microsoft.com/office/drawing/2014/main" id="{F25A4847-FC20-D9BF-0BDE-26EC7EF7435D}"/>
               </a:ext>
             </a:extLst>
           </p:cNvPr>
@@ -2611,7 +2622,7 @@
           <p:cNvPr id="3" name="Content Placeholder 2">
             <a:extLst>
               <a:ext uri="{FF2B5EF4-FFF2-40B4-BE49-F238E27FC236}">
-                <a16:creationId xmlns:a16="http://schemas.microsoft.com/office/drawing/2014/main" xmlns="" id="{68D9C584-AC19-D7B4-9DFE-7C1BC2E1BCC5}"/>
+                <a16:creationId xmlns:a16="http://schemas.microsoft.com/office/drawing/2014/main" id="{68D9C584-AC19-D7B4-9DFE-7C1BC2E1BCC5}"/>
               </a:ext>
             </a:extLst>
           </p:cNvPr>
@@ -2702,7 +2713,7 @@
           <p:cNvPr id="4" name="Text Placeholder 3">
             <a:extLst>
               <a:ext uri="{FF2B5EF4-FFF2-40B4-BE49-F238E27FC236}">
-                <a16:creationId xmlns:a16="http://schemas.microsoft.com/office/drawing/2014/main" xmlns="" id="{2F4A3262-CE8D-2419-DCCC-C536E9FDAC37}"/>
+                <a16:creationId xmlns:a16="http://schemas.microsoft.com/office/drawing/2014/main" id="{2F4A3262-CE8D-2419-DCCC-C536E9FDAC37}"/>
               </a:ext>
             </a:extLst>
           </p:cNvPr>
@@ -2773,7 +2784,7 @@
           <p:cNvPr id="5" name="Date Placeholder 4">
             <a:extLst>
               <a:ext uri="{FF2B5EF4-FFF2-40B4-BE49-F238E27FC236}">
-                <a16:creationId xmlns:a16="http://schemas.microsoft.com/office/drawing/2014/main" xmlns="" id="{294758D6-7AF2-29C5-E0EE-3B7BE155EC20}"/>
+                <a16:creationId xmlns:a16="http://schemas.microsoft.com/office/drawing/2014/main" id="{294758D6-7AF2-29C5-E0EE-3B7BE155EC20}"/>
               </a:ext>
             </a:extLst>
           </p:cNvPr>
@@ -2791,7 +2802,7 @@
           <a:p>
             <a:fld id="{71D7E9DA-13C6-48A4-9305-B592482DE8CE}" type="datetime1">
               <a:rPr lang="en-IN" smtClean="0"/>
-              <a:t>05/10/26</a:t>
+              <a:t>25-10-2026</a:t>
             </a:fld>
             <a:endParaRPr lang="en-IN"/>
           </a:p>
@@ -2802,7 +2813,7 @@
           <p:cNvPr id="6" name="Footer Placeholder 5">
             <a:extLst>
               <a:ext uri="{FF2B5EF4-FFF2-40B4-BE49-F238E27FC236}">
-                <a16:creationId xmlns:a16="http://schemas.microsoft.com/office/drawing/2014/main" xmlns="" id="{45AAC7E7-68C4-7616-2DE1-0333E2C446CC}"/>
+                <a16:creationId xmlns:a16="http://schemas.microsoft.com/office/drawing/2014/main" id="{45AAC7E7-68C4-7616-2DE1-0333E2C446CC}"/>
               </a:ext>
             </a:extLst>
           </p:cNvPr>
@@ -2830,7 +2841,7 @@
           <p:cNvPr id="7" name="Slide Number Placeholder 6">
             <a:extLst>
               <a:ext uri="{FF2B5EF4-FFF2-40B4-BE49-F238E27FC236}">
-                <a16:creationId xmlns:a16="http://schemas.microsoft.com/office/drawing/2014/main" xmlns="" id="{5E9EF51B-1685-66FF-0783-23584C251751}"/>
+                <a16:creationId xmlns:a16="http://schemas.microsoft.com/office/drawing/2014/main" id="{5E9EF51B-1685-66FF-0783-23584C251751}"/>
               </a:ext>
             </a:extLst>
           </p:cNvPr>
@@ -2889,7 +2900,7 @@
           <p:cNvPr id="2" name="Title 1">
             <a:extLst>
               <a:ext uri="{FF2B5EF4-FFF2-40B4-BE49-F238E27FC236}">
-                <a16:creationId xmlns:a16="http://schemas.microsoft.com/office/drawing/2014/main" xmlns="" id="{13939D0E-3A71-7252-C837-B8281F0DED9C}"/>
+                <a16:creationId xmlns:a16="http://schemas.microsoft.com/office/drawing/2014/main" id="{13939D0E-3A71-7252-C837-B8281F0DED9C}"/>
               </a:ext>
             </a:extLst>
           </p:cNvPr>
@@ -2927,7 +2938,7 @@
           <p:cNvPr id="3" name="Picture Placeholder 2">
             <a:extLst>
               <a:ext uri="{FF2B5EF4-FFF2-40B4-BE49-F238E27FC236}">
-                <a16:creationId xmlns:a16="http://schemas.microsoft.com/office/drawing/2014/main" xmlns="" id="{AFE3D557-6893-299F-57A8-A7B173F10143}"/>
+                <a16:creationId xmlns:a16="http://schemas.microsoft.com/office/drawing/2014/main" id="{AFE3D557-6893-299F-57A8-A7B173F10143}"/>
               </a:ext>
             </a:extLst>
           </p:cNvPr>
@@ -2994,7 +3005,7 @@
           <p:cNvPr id="4" name="Text Placeholder 3">
             <a:extLst>
               <a:ext uri="{FF2B5EF4-FFF2-40B4-BE49-F238E27FC236}">
-                <a16:creationId xmlns:a16="http://schemas.microsoft.com/office/drawing/2014/main" xmlns="" id="{C4CC8BA2-BB08-F4E3-5660-C7370BA568C3}"/>
+                <a16:creationId xmlns:a16="http://schemas.microsoft.com/office/drawing/2014/main" id="{C4CC8BA2-BB08-F4E3-5660-C7370BA568C3}"/>
               </a:ext>
             </a:extLst>
           </p:cNvPr>
@@ -3065,7 +3076,7 @@
           <p:cNvPr id="5" name="Date Placeholder 4">
             <a:extLst>
               <a:ext uri="{FF2B5EF4-FFF2-40B4-BE49-F238E27FC236}">
-                <a16:creationId xmlns:a16="http://schemas.microsoft.com/office/drawing/2014/main" xmlns="" id="{CE57E1CE-C7CA-966D-8661-1E99A7DA2174}"/>
+                <a16:creationId xmlns:a16="http://schemas.microsoft.com/office/drawing/2014/main" id="{CE57E1CE-C7CA-966D-8661-1E99A7DA2174}"/>
               </a:ext>
             </a:extLst>
           </p:cNvPr>
@@ -3083,7 +3094,7 @@
           <a:p>
             <a:fld id="{F45E7C4B-C575-4DCF-9B63-045662930500}" type="datetime1">
               <a:rPr lang="en-IN" smtClean="0"/>
-              <a:t>05/10/26</a:t>
+              <a:t>25-10-2026</a:t>
             </a:fld>
             <a:endParaRPr lang="en-IN"/>
           </a:p>
@@ -3094,7 +3105,7 @@
           <p:cNvPr id="6" name="Footer Placeholder 5">
             <a:extLst>
               <a:ext uri="{FF2B5EF4-FFF2-40B4-BE49-F238E27FC236}">
-                <a16:creationId xmlns:a16="http://schemas.microsoft.com/office/drawing/2014/main" xmlns="" id="{66055516-3E64-07E5-10C5-DE056657E44B}"/>
+                <a16:creationId xmlns:a16="http://schemas.microsoft.com/office/drawing/2014/main" id="{66055516-3E64-07E5-10C5-DE056657E44B}"/>
               </a:ext>
             </a:extLst>
           </p:cNvPr>
@@ -3122,7 +3133,7 @@
           <p:cNvPr id="7" name="Slide Number Placeholder 6">
             <a:extLst>
               <a:ext uri="{FF2B5EF4-FFF2-40B4-BE49-F238E27FC236}">
-                <a16:creationId xmlns:a16="http://schemas.microsoft.com/office/drawing/2014/main" xmlns="" id="{AFBA5AD5-9867-E76D-C035-2856CCFBC128}"/>
+                <a16:creationId xmlns:a16="http://schemas.microsoft.com/office/drawing/2014/main" id="{AFBA5AD5-9867-E76D-C035-2856CCFBC128}"/>
               </a:ext>
             </a:extLst>
           </p:cNvPr>
@@ -3186,7 +3197,7 @@
           <p:cNvPr id="2" name="Title Placeholder 1">
             <a:extLst>
               <a:ext uri="{FF2B5EF4-FFF2-40B4-BE49-F238E27FC236}">
-                <a16:creationId xmlns:a16="http://schemas.microsoft.com/office/drawing/2014/main" xmlns="" id="{85454249-E28B-CF91-F4A6-9762E4F38B7D}"/>
+                <a16:creationId xmlns:a16="http://schemas.microsoft.com/office/drawing/2014/main" id="{85454249-E28B-CF91-F4A6-9762E4F38B7D}"/>
               </a:ext>
             </a:extLst>
           </p:cNvPr>
@@ -3225,7 +3236,7 @@
           <p:cNvPr id="3" name="Text Placeholder 2">
             <a:extLst>
               <a:ext uri="{FF2B5EF4-FFF2-40B4-BE49-F238E27FC236}">
-                <a16:creationId xmlns:a16="http://schemas.microsoft.com/office/drawing/2014/main" xmlns="" id="{21E3D641-7C66-CA7D-30A7-7F95AC27EF4C}"/>
+                <a16:creationId xmlns:a16="http://schemas.microsoft.com/office/drawing/2014/main" id="{21E3D641-7C66-CA7D-30A7-7F95AC27EF4C}"/>
               </a:ext>
             </a:extLst>
           </p:cNvPr>
@@ -3293,7 +3304,7 @@
           <p:cNvPr id="4" name="Date Placeholder 3">
             <a:extLst>
               <a:ext uri="{FF2B5EF4-FFF2-40B4-BE49-F238E27FC236}">
-                <a16:creationId xmlns:a16="http://schemas.microsoft.com/office/drawing/2014/main" xmlns="" id="{B5E1D408-B228-838E-3E43-4304680A536B}"/>
+                <a16:creationId xmlns:a16="http://schemas.microsoft.com/office/drawing/2014/main" id="{B5E1D408-B228-838E-3E43-4304680A536B}"/>
               </a:ext>
             </a:extLst>
           </p:cNvPr>
@@ -3329,7 +3340,7 @@
           <a:p>
             <a:fld id="{43827C3E-786B-4150-9177-1C28966A2ADC}" type="datetime1">
               <a:rPr lang="en-IN" smtClean="0"/>
-              <a:t>05/10/26</a:t>
+              <a:t>25-10-2026</a:t>
             </a:fld>
             <a:endParaRPr lang="en-IN"/>
           </a:p>
@@ -3340,7 +3351,7 @@
           <p:cNvPr id="5" name="Footer Placeholder 4">
             <a:extLst>
               <a:ext uri="{FF2B5EF4-FFF2-40B4-BE49-F238E27FC236}">
-                <a16:creationId xmlns:a16="http://schemas.microsoft.com/office/drawing/2014/main" xmlns="" id="{DCEC7A69-1922-F157-900C-FF956683161C}"/>
+                <a16:creationId xmlns:a16="http://schemas.microsoft.com/office/drawing/2014/main" id="{DCEC7A69-1922-F157-900C-FF956683161C}"/>
               </a:ext>
             </a:extLst>
           </p:cNvPr>
@@ -3386,7 +3397,7 @@
           <p:cNvPr id="6" name="Slide Number Placeholder 5">
             <a:extLst>
               <a:ext uri="{FF2B5EF4-FFF2-40B4-BE49-F238E27FC236}">
-                <a16:creationId xmlns:a16="http://schemas.microsoft.com/office/drawing/2014/main" xmlns="" id="{51B80E76-E345-1553-9664-0BCF569B55B9}"/>
+                <a16:creationId xmlns:a16="http://schemas.microsoft.com/office/drawing/2014/main" id="{51B80E76-E345-1553-9664-0BCF569B55B9}"/>
               </a:ext>
             </a:extLst>
           </p:cNvPr>
@@ -3755,7 +3766,7 @@
           <p:cNvPr id="5" name="Picture 4">
             <a:extLst>
               <a:ext uri="{FF2B5EF4-FFF2-40B4-BE49-F238E27FC236}">
-                <a16:creationId xmlns:a16="http://schemas.microsoft.com/office/drawing/2014/main" xmlns="" id="{3E9E27CD-EF84-CB3A-3D07-A3152356892A}"/>
+                <a16:creationId xmlns:a16="http://schemas.microsoft.com/office/drawing/2014/main" id="{3E9E27CD-EF84-CB3A-3D07-A3152356892A}"/>
               </a:ext>
             </a:extLst>
           </p:cNvPr>
@@ -3785,7 +3796,7 @@
           <p:cNvPr id="7" name="Title 6">
             <a:extLst>
               <a:ext uri="{FF2B5EF4-FFF2-40B4-BE49-F238E27FC236}">
-                <a16:creationId xmlns:a16="http://schemas.microsoft.com/office/drawing/2014/main" xmlns="" id="{8BAD67C4-20B4-E1F6-A7E7-C8C33181D0C9}"/>
+                <a16:creationId xmlns:a16="http://schemas.microsoft.com/office/drawing/2014/main" id="{8BAD67C4-20B4-E1F6-A7E7-C8C33181D0C9}"/>
               </a:ext>
             </a:extLst>
           </p:cNvPr>
@@ -3831,7 +3842,7 @@
           <p:cNvPr id="9" name="object 3">
             <a:extLst>
               <a:ext uri="{FF2B5EF4-FFF2-40B4-BE49-F238E27FC236}">
-                <a16:creationId xmlns:a16="http://schemas.microsoft.com/office/drawing/2014/main" xmlns="" id="{68BC382C-506F-4908-6AC3-C0AA73064F47}"/>
+                <a16:creationId xmlns:a16="http://schemas.microsoft.com/office/drawing/2014/main" id="{68BC382C-506F-4908-6AC3-C0AA73064F47}"/>
               </a:ext>
             </a:extLst>
           </p:cNvPr>
@@ -3940,6 +3951,11 @@
                 <a:spcPts val="600"/>
               </a:spcAft>
             </a:pPr>
+            <a:endParaRPr sz="1500" b="0">
+              <a:solidFill>
+                <a:srgbClr val="1A1A1A"/>
+              </a:solidFill>
+            </a:endParaRPr>
           </a:p>
           <a:p>
             <a:pPr>
@@ -3986,6 +4002,11 @@
                 <a:spcPts val="600"/>
               </a:spcAft>
             </a:pPr>
+            <a:endParaRPr sz="1500" b="0">
+              <a:solidFill>
+                <a:srgbClr val="1A1A1A"/>
+              </a:solidFill>
+            </a:endParaRPr>
           </a:p>
           <a:p>
             <a:pPr>
@@ -4017,13 +4038,6 @@
   <p:clrMapOvr>
     <a:masterClrMapping/>
   </p:clrMapOvr>
-  <p:timing>
-    <p:tnLst>
-      <p:par>
-        <p:cTn xmlns:p14="http://schemas.microsoft.com/office/powerpoint/2010/main" id="1" dur="indefinite" restart="never" nodeType="tmRoot"/>
-      </p:par>
-    </p:tnLst>
-  </p:timing>
 </p:sld>
 </file>
 
@@ -4035,7 +4049,7 @@
         <p:cNvPr id="1" name="">
           <a:extLst>
             <a:ext uri="{FF2B5EF4-FFF2-40B4-BE49-F238E27FC236}">
-              <a16:creationId xmlns:a16="http://schemas.microsoft.com/office/drawing/2014/main" xmlns="" id="{4D42F2ED-50F9-3DFA-95BB-1A1059C5D893}"/>
+              <a16:creationId xmlns:a16="http://schemas.microsoft.com/office/drawing/2014/main" id="{4D42F2ED-50F9-3DFA-95BB-1A1059C5D893}"/>
             </a:ext>
           </a:extLst>
         </p:cNvPr>
@@ -4055,7 +4069,7 @@
           <p:cNvPr id="3" name="Content Placeholder 2">
             <a:extLst>
               <a:ext uri="{FF2B5EF4-FFF2-40B4-BE49-F238E27FC236}">
-                <a16:creationId xmlns:a16="http://schemas.microsoft.com/office/drawing/2014/main" xmlns="" id="{A93F2560-A5FE-A724-8F39-E7E901E8FADC}"/>
+                <a16:creationId xmlns:a16="http://schemas.microsoft.com/office/drawing/2014/main" id="{A93F2560-A5FE-A724-8F39-E7E901E8FADC}"/>
               </a:ext>
             </a:extLst>
           </p:cNvPr>
@@ -4205,7 +4219,7 @@
           <p:cNvPr id="4" name="object 2">
             <a:extLst>
               <a:ext uri="{FF2B5EF4-FFF2-40B4-BE49-F238E27FC236}">
-                <a16:creationId xmlns:a16="http://schemas.microsoft.com/office/drawing/2014/main" xmlns="" id="{B27DA514-48FC-4BF4-8205-DE21D456C5FF}"/>
+                <a16:creationId xmlns:a16="http://schemas.microsoft.com/office/drawing/2014/main" id="{B27DA514-48FC-4BF4-8205-DE21D456C5FF}"/>
               </a:ext>
             </a:extLst>
           </p:cNvPr>
@@ -4258,7 +4272,7 @@
           <p:cNvPr id="2" name="Date Placeholder 1">
             <a:extLst>
               <a:ext uri="{FF2B5EF4-FFF2-40B4-BE49-F238E27FC236}">
-                <a16:creationId xmlns:a16="http://schemas.microsoft.com/office/drawing/2014/main" xmlns="" id="{D74A04E0-6631-130F-A154-C85D978EA39B}"/>
+                <a16:creationId xmlns:a16="http://schemas.microsoft.com/office/drawing/2014/main" id="{D74A04E0-6631-130F-A154-C85D978EA39B}"/>
               </a:ext>
             </a:extLst>
           </p:cNvPr>
@@ -4279,7 +4293,7 @@
                 <a:latin typeface="Times New Roman" panose="02020603050405020304" pitchFamily="18" charset="0"/>
                 <a:cs typeface="Times New Roman" panose="02020603050405020304" pitchFamily="18" charset="0"/>
               </a:rPr>
-              <a:t>05/10/26</a:t>
+              <a:t>25-10-2026</a:t>
             </a:fld>
             <a:endParaRPr lang="en-IN">
               <a:latin typeface="Times New Roman" panose="02020603050405020304" pitchFamily="18" charset="0"/>
@@ -4293,7 +4307,7 @@
           <p:cNvPr id="5" name="Footer Placeholder 4">
             <a:extLst>
               <a:ext uri="{FF2B5EF4-FFF2-40B4-BE49-F238E27FC236}">
-                <a16:creationId xmlns:a16="http://schemas.microsoft.com/office/drawing/2014/main" xmlns="" id="{39615995-EDEB-C984-B852-1229C23B1A05}"/>
+                <a16:creationId xmlns:a16="http://schemas.microsoft.com/office/drawing/2014/main" id="{39615995-EDEB-C984-B852-1229C23B1A05}"/>
               </a:ext>
             </a:extLst>
           </p:cNvPr>
@@ -4324,7 +4338,7 @@
           <p:cNvPr id="6" name="Slide Number Placeholder 5">
             <a:extLst>
               <a:ext uri="{FF2B5EF4-FFF2-40B4-BE49-F238E27FC236}">
-                <a16:creationId xmlns:a16="http://schemas.microsoft.com/office/drawing/2014/main" xmlns="" id="{067F5109-389C-3E37-E553-A559233EFD96}"/>
+                <a16:creationId xmlns:a16="http://schemas.microsoft.com/office/drawing/2014/main" id="{067F5109-389C-3E37-E553-A559233EFD96}"/>
               </a:ext>
             </a:extLst>
           </p:cNvPr>
@@ -4375,7 +4389,7 @@
         <p:cNvPr id="1" name="">
           <a:extLst>
             <a:ext uri="{FF2B5EF4-FFF2-40B4-BE49-F238E27FC236}">
-              <a16:creationId xmlns:a16="http://schemas.microsoft.com/office/drawing/2014/main" xmlns="" id="{121556E8-0003-02C5-D37D-A5CC4CE44D5B}"/>
+              <a16:creationId xmlns:a16="http://schemas.microsoft.com/office/drawing/2014/main" id="{121556E8-0003-02C5-D37D-A5CC4CE44D5B}"/>
             </a:ext>
           </a:extLst>
         </p:cNvPr>
@@ -4395,7 +4409,7 @@
           <p:cNvPr id="3" name="Content Placeholder 2">
             <a:extLst>
               <a:ext uri="{FF2B5EF4-FFF2-40B4-BE49-F238E27FC236}">
-                <a16:creationId xmlns:a16="http://schemas.microsoft.com/office/drawing/2014/main" xmlns="" id="{DFB67973-736B-B05D-D378-DA7CBE3EBDAD}"/>
+                <a16:creationId xmlns:a16="http://schemas.microsoft.com/office/drawing/2014/main" id="{DFB67973-736B-B05D-D378-DA7CBE3EBDAD}"/>
               </a:ext>
             </a:extLst>
           </p:cNvPr>
@@ -4496,7 +4510,7 @@
           <p:cNvPr id="4" name="object 2">
             <a:extLst>
               <a:ext uri="{FF2B5EF4-FFF2-40B4-BE49-F238E27FC236}">
-                <a16:creationId xmlns:a16="http://schemas.microsoft.com/office/drawing/2014/main" xmlns="" id="{E386D544-A80A-B599-44C7-B40BA6ECC63C}"/>
+                <a16:creationId xmlns:a16="http://schemas.microsoft.com/office/drawing/2014/main" id="{E386D544-A80A-B599-44C7-B40BA6ECC63C}"/>
               </a:ext>
             </a:extLst>
           </p:cNvPr>
@@ -4549,7 +4563,7 @@
           <p:cNvPr id="2" name="Date Placeholder 1">
             <a:extLst>
               <a:ext uri="{FF2B5EF4-FFF2-40B4-BE49-F238E27FC236}">
-                <a16:creationId xmlns:a16="http://schemas.microsoft.com/office/drawing/2014/main" xmlns="" id="{5D376B32-FA12-4961-0DBF-EE57A7705BF9}"/>
+                <a16:creationId xmlns:a16="http://schemas.microsoft.com/office/drawing/2014/main" id="{5D376B32-FA12-4961-0DBF-EE57A7705BF9}"/>
               </a:ext>
             </a:extLst>
           </p:cNvPr>
@@ -4570,7 +4584,7 @@
                 <a:latin typeface="Times New Roman" panose="02020603050405020304" pitchFamily="18" charset="0"/>
                 <a:cs typeface="Times New Roman" panose="02020603050405020304" pitchFamily="18" charset="0"/>
               </a:rPr>
-              <a:t>05/10/26</a:t>
+              <a:t>25-10-2026</a:t>
             </a:fld>
             <a:endParaRPr lang="en-IN">
               <a:latin typeface="Times New Roman" panose="02020603050405020304" pitchFamily="18" charset="0"/>
@@ -4584,7 +4598,7 @@
           <p:cNvPr id="5" name="Footer Placeholder 4">
             <a:extLst>
               <a:ext uri="{FF2B5EF4-FFF2-40B4-BE49-F238E27FC236}">
-                <a16:creationId xmlns:a16="http://schemas.microsoft.com/office/drawing/2014/main" xmlns="" id="{8B0EF323-27AB-5372-4287-A24CA541146A}"/>
+                <a16:creationId xmlns:a16="http://schemas.microsoft.com/office/drawing/2014/main" id="{8B0EF323-27AB-5372-4287-A24CA541146A}"/>
               </a:ext>
             </a:extLst>
           </p:cNvPr>
@@ -4615,7 +4629,7 @@
           <p:cNvPr id="6" name="Slide Number Placeholder 5">
             <a:extLst>
               <a:ext uri="{FF2B5EF4-FFF2-40B4-BE49-F238E27FC236}">
-                <a16:creationId xmlns:a16="http://schemas.microsoft.com/office/drawing/2014/main" xmlns="" id="{76AAAC16-1233-230F-5D3B-645E6B2832A4}"/>
+                <a16:creationId xmlns:a16="http://schemas.microsoft.com/office/drawing/2014/main" id="{76AAAC16-1233-230F-5D3B-645E6B2832A4}"/>
               </a:ext>
             </a:extLst>
           </p:cNvPr>
@@ -4690,7 +4704,7 @@
         <p:cNvPr id="1" name="">
           <a:extLst>
             <a:ext uri="{FF2B5EF4-FFF2-40B4-BE49-F238E27FC236}">
-              <a16:creationId xmlns:a16="http://schemas.microsoft.com/office/drawing/2014/main" xmlns="" id="{BCC49A39-F362-DB35-B5DF-7E322AB9CAE0}"/>
+              <a16:creationId xmlns:a16="http://schemas.microsoft.com/office/drawing/2014/main" id="{BCC49A39-F362-DB35-B5DF-7E322AB9CAE0}"/>
             </a:ext>
           </a:extLst>
         </p:cNvPr>
@@ -4710,7 +4724,7 @@
           <p:cNvPr id="3" name="Content Placeholder 2">
             <a:extLst>
               <a:ext uri="{FF2B5EF4-FFF2-40B4-BE49-F238E27FC236}">
-                <a16:creationId xmlns:a16="http://schemas.microsoft.com/office/drawing/2014/main" xmlns="" id="{004F33DD-84F0-A7F9-A1DC-A4DEA1A7D846}"/>
+                <a16:creationId xmlns:a16="http://schemas.microsoft.com/office/drawing/2014/main" id="{004F33DD-84F0-A7F9-A1DC-A4DEA1A7D846}"/>
               </a:ext>
             </a:extLst>
           </p:cNvPr>
@@ -4860,7 +4874,7 @@
           <p:cNvPr id="4" name="object 2">
             <a:extLst>
               <a:ext uri="{FF2B5EF4-FFF2-40B4-BE49-F238E27FC236}">
-                <a16:creationId xmlns:a16="http://schemas.microsoft.com/office/drawing/2014/main" xmlns="" id="{3754A46F-4AC3-5AF1-0B78-C0B5112BD14C}"/>
+                <a16:creationId xmlns:a16="http://schemas.microsoft.com/office/drawing/2014/main" id="{3754A46F-4AC3-5AF1-0B78-C0B5112BD14C}"/>
               </a:ext>
             </a:extLst>
           </p:cNvPr>
@@ -4913,7 +4927,7 @@
           <p:cNvPr id="2" name="Date Placeholder 1">
             <a:extLst>
               <a:ext uri="{FF2B5EF4-FFF2-40B4-BE49-F238E27FC236}">
-                <a16:creationId xmlns:a16="http://schemas.microsoft.com/office/drawing/2014/main" xmlns="" id="{851BAA61-633E-E24B-7DEE-4B2A2B1FA9A4}"/>
+                <a16:creationId xmlns:a16="http://schemas.microsoft.com/office/drawing/2014/main" id="{851BAA61-633E-E24B-7DEE-4B2A2B1FA9A4}"/>
               </a:ext>
             </a:extLst>
           </p:cNvPr>
@@ -4934,7 +4948,7 @@
                 <a:latin typeface="Times New Roman" panose="02020603050405020304" pitchFamily="18" charset="0"/>
                 <a:cs typeface="Times New Roman" panose="02020603050405020304" pitchFamily="18" charset="0"/>
               </a:rPr>
-              <a:t>05/10/26</a:t>
+              <a:t>25-10-2026</a:t>
             </a:fld>
             <a:endParaRPr lang="en-IN">
               <a:latin typeface="Times New Roman" panose="02020603050405020304" pitchFamily="18" charset="0"/>
@@ -4948,7 +4962,7 @@
           <p:cNvPr id="5" name="Footer Placeholder 4">
             <a:extLst>
               <a:ext uri="{FF2B5EF4-FFF2-40B4-BE49-F238E27FC236}">
-                <a16:creationId xmlns:a16="http://schemas.microsoft.com/office/drawing/2014/main" xmlns="" id="{AB93C553-2D0C-5A0A-39DC-21C43BD88BF0}"/>
+                <a16:creationId xmlns:a16="http://schemas.microsoft.com/office/drawing/2014/main" id="{AB93C553-2D0C-5A0A-39DC-21C43BD88BF0}"/>
               </a:ext>
             </a:extLst>
           </p:cNvPr>
@@ -4979,7 +4993,7 @@
           <p:cNvPr id="6" name="Slide Number Placeholder 5">
             <a:extLst>
               <a:ext uri="{FF2B5EF4-FFF2-40B4-BE49-F238E27FC236}">
-                <a16:creationId xmlns:a16="http://schemas.microsoft.com/office/drawing/2014/main" xmlns="" id="{6BF7A7E9-45BE-62F4-D3A6-F19DC6ABEDE6}"/>
+                <a16:creationId xmlns:a16="http://schemas.microsoft.com/office/drawing/2014/main" id="{6BF7A7E9-45BE-62F4-D3A6-F19DC6ABEDE6}"/>
               </a:ext>
             </a:extLst>
           </p:cNvPr>
@@ -5044,7 +5058,7 @@
           <p:cNvPr id="2" name="Title 1">
             <a:extLst>
               <a:ext uri="{FF2B5EF4-FFF2-40B4-BE49-F238E27FC236}">
-                <a16:creationId xmlns:a16="http://schemas.microsoft.com/office/drawing/2014/main" xmlns="" id="{751EE89F-6F96-DF9C-768A-8B2A7BEAD23D}"/>
+                <a16:creationId xmlns:a16="http://schemas.microsoft.com/office/drawing/2014/main" id="{751EE89F-6F96-DF9C-768A-8B2A7BEAD23D}"/>
               </a:ext>
             </a:extLst>
           </p:cNvPr>
@@ -5075,7 +5089,7 @@
           <p:cNvPr id="3" name="Content Placeholder 2">
             <a:extLst>
               <a:ext uri="{FF2B5EF4-FFF2-40B4-BE49-F238E27FC236}">
-                <a16:creationId xmlns:a16="http://schemas.microsoft.com/office/drawing/2014/main" xmlns="" id="{B65DBCB3-75D0-D33A-66EA-4DDA4A02213E}"/>
+                <a16:creationId xmlns:a16="http://schemas.microsoft.com/office/drawing/2014/main" id="{B65DBCB3-75D0-D33A-66EA-4DDA4A02213E}"/>
               </a:ext>
             </a:extLst>
           </p:cNvPr>
@@ -5089,7 +5103,7 @@
         <p:spPr/>
         <p:txBody>
           <a:bodyPr wrap="square">
-            <a:normAutofit fontScale="92500" lnSpcReduction="20000"/>
+            <a:normAutofit/>
           </a:bodyPr>
           <a:lstStyle/>
           <a:p>
@@ -5102,7 +5116,7 @@
               </a:spcAft>
             </a:pPr>
             <a:r>
-              <a:rPr sz="1400" b="1">
+              <a:rPr sz="1400" b="1" dirty="0">
                 <a:solidFill>
                   <a:srgbClr val="1A1A1A"/>
                 </a:solidFill>
@@ -5120,12 +5134,28 @@
               </a:spcAft>
             </a:pPr>
             <a:r>
-              <a:rPr sz="1400" b="0">
+              <a:rPr sz="1400" b="0" dirty="0">
                 <a:solidFill>
                   <a:srgbClr val="1A1A1A"/>
                 </a:solidFill>
               </a:rPr>
-              <a:t>Status: full paper drafted — 8 sections, 5 result tables, measured evaluation. Target venue to be finalised with the guide.</a:t>
+              <a:t>Status: full paper drafted — 8 sections, 5 result tables, measured evaluation. Target venue to be </a:t>
+            </a:r>
+            <a:r>
+              <a:rPr sz="1400" b="0" dirty="0" err="1">
+                <a:solidFill>
+                  <a:srgbClr val="1A1A1A"/>
+                </a:solidFill>
+              </a:rPr>
+              <a:t>finalised</a:t>
+            </a:r>
+            <a:r>
+              <a:rPr sz="1400" b="0" dirty="0">
+                <a:solidFill>
+                  <a:srgbClr val="1A1A1A"/>
+                </a:solidFill>
+              </a:rPr>
+              <a:t> with the guide.</a:t>
             </a:r>
           </a:p>
           <a:p>
@@ -5138,7 +5168,7 @@
               </a:spcAft>
             </a:pPr>
             <a:r>
-              <a:rPr sz="1400" b="0">
+              <a:rPr sz="1400" b="0" dirty="0">
                 <a:solidFill>
                   <a:srgbClr val="1A1A1A"/>
                 </a:solidFill>
@@ -5146,24 +5176,6 @@
               <a:t>Title: “From Detection to Verified Replacement: An End-to-End Framework for Post-Quantum Cryptographic Migration of Python Codebases”</a:t>
             </a:r>
           </a:p>
-          <a:p>
-            <a:pPr>
-              <a:lnSpc>
-                <a:spcPct val="100000"/>
-              </a:lnSpc>
-              <a:spcAft>
-                <a:spcPts val="600"/>
-              </a:spcAft>
-            </a:pPr>
-            <a:r>
-              <a:rPr sz="1400" b="0" i="1">
-                <a:solidFill>
-                  <a:srgbClr val="A03020"/>
-                </a:solidFill>
-              </a:rPr>
-              <a:t>[Replace this slide with the submission / acceptance screenshot once the paper is submitted, and upload the proof to the given link before 27 Oct 2026.]</a:t>
-            </a:r>
-          </a:p>
         </p:txBody>
       </p:sp>
       <p:sp>
@@ -5171,7 +5183,7 @@
           <p:cNvPr id="4" name="Date Placeholder 3">
             <a:extLst>
               <a:ext uri="{FF2B5EF4-FFF2-40B4-BE49-F238E27FC236}">
-                <a16:creationId xmlns:a16="http://schemas.microsoft.com/office/drawing/2014/main" xmlns="" id="{7F86E621-0A63-DDD2-60A0-511D9D7C817E}"/>
+                <a16:creationId xmlns:a16="http://schemas.microsoft.com/office/drawing/2014/main" id="{7F86E621-0A63-DDD2-60A0-511D9D7C817E}"/>
               </a:ext>
             </a:extLst>
           </p:cNvPr>
@@ -5189,7 +5201,7 @@
           <a:p>
             <a:fld id="{FEA886FF-1BA7-4533-94E6-869CE1E2970B}" type="datetime1">
               <a:rPr lang="en-IN" smtClean="0"/>
-              <a:t>05/10/26</a:t>
+              <a:t>25-10-2026</a:t>
             </a:fld>
             <a:endParaRPr lang="en-IN"/>
           </a:p>
@@ -5200,7 +5212,7 @@
           <p:cNvPr id="5" name="Footer Placeholder 4">
             <a:extLst>
               <a:ext uri="{FF2B5EF4-FFF2-40B4-BE49-F238E27FC236}">
-                <a16:creationId xmlns:a16="http://schemas.microsoft.com/office/drawing/2014/main" xmlns="" id="{74966F66-9685-CC43-3B74-035A03CAF328}"/>
+                <a16:creationId xmlns:a16="http://schemas.microsoft.com/office/drawing/2014/main" id="{74966F66-9685-CC43-3B74-035A03CAF328}"/>
               </a:ext>
             </a:extLst>
           </p:cNvPr>
@@ -5228,7 +5240,7 @@
           <p:cNvPr id="6" name="Slide Number Placeholder 5">
             <a:extLst>
               <a:ext uri="{FF2B5EF4-FFF2-40B4-BE49-F238E27FC236}">
-                <a16:creationId xmlns:a16="http://schemas.microsoft.com/office/drawing/2014/main" xmlns="" id="{32234F7B-54B7-5C34-9356-A94BE39E2151}"/>
+                <a16:creationId xmlns:a16="http://schemas.microsoft.com/office/drawing/2014/main" id="{32234F7B-54B7-5C34-9356-A94BE39E2151}"/>
               </a:ext>
             </a:extLst>
           </p:cNvPr>
@@ -5273,7 +5285,7 @@
         <p:cNvPr id="1" name="">
           <a:extLst>
             <a:ext uri="{FF2B5EF4-FFF2-40B4-BE49-F238E27FC236}">
-              <a16:creationId xmlns:a16="http://schemas.microsoft.com/office/drawing/2014/main" xmlns="" id="{2F70E1A0-FA4A-8258-6E10-9F00EDC0BC8B}"/>
+              <a16:creationId xmlns:a16="http://schemas.microsoft.com/office/drawing/2014/main" id="{2F70E1A0-FA4A-8258-6E10-9F00EDC0BC8B}"/>
             </a:ext>
           </a:extLst>
         </p:cNvPr>
@@ -5293,7 +5305,7 @@
           <p:cNvPr id="4" name="object 2">
             <a:extLst>
               <a:ext uri="{FF2B5EF4-FFF2-40B4-BE49-F238E27FC236}">
-                <a16:creationId xmlns:a16="http://schemas.microsoft.com/office/drawing/2014/main" xmlns="" id="{7CFC0C65-61CC-E657-43F7-99C8E5362448}"/>
+                <a16:creationId xmlns:a16="http://schemas.microsoft.com/office/drawing/2014/main" id="{7CFC0C65-61CC-E657-43F7-99C8E5362448}"/>
               </a:ext>
             </a:extLst>
           </p:cNvPr>
@@ -5346,7 +5358,7 @@
           <p:cNvPr id="2" name="Rectangle 3">
             <a:extLst>
               <a:ext uri="{FF2B5EF4-FFF2-40B4-BE49-F238E27FC236}">
-                <a16:creationId xmlns:a16="http://schemas.microsoft.com/office/drawing/2014/main" xmlns="" id="{CC4F09CD-956A-B8B3-1183-9C28C80DDB9A}"/>
+                <a16:creationId xmlns:a16="http://schemas.microsoft.com/office/drawing/2014/main" id="{CC4F09CD-956A-B8B3-1183-9C28C80DDB9A}"/>
               </a:ext>
             </a:extLst>
           </p:cNvPr>
@@ -5372,14 +5384,14 @@
           <a:effectLst/>
           <a:extLst>
             <a:ext uri="{909E8E84-426E-40dd-AFC4-6F175D3DCCD1}">
-              <a14:hiddenFill xmlns:a14="http://schemas.microsoft.com/office/drawing/2010/main">
+              <a14:hiddenFill xmlns:a14="http://schemas.microsoft.com/office/drawing/2010/main" xmlns="">
                 <a:solidFill>
                   <a:schemeClr val="accent1"/>
                 </a:solidFill>
               </a14:hiddenFill>
             </a:ext>
             <a:ext uri="{91240B29-F687-4f45-9708-019B960494DF}">
-              <a14:hiddenLine xmlns:a14="http://schemas.microsoft.com/office/drawing/2010/main" w="9525">
+              <a14:hiddenLine xmlns:a14="http://schemas.microsoft.com/office/drawing/2010/main" xmlns="" w="9525">
                 <a:solidFill>
                   <a:schemeClr val="tx1"/>
                 </a:solidFill>
@@ -5389,7 +5401,7 @@
               </a14:hiddenLine>
             </a:ext>
             <a:ext uri="{AF507438-7753-43e0-B8FC-AC1667EBCBE1}">
-              <a14:hiddenEffects xmlns:a14="http://schemas.microsoft.com/office/drawing/2010/main">
+              <a14:hiddenEffects xmlns:a14="http://schemas.microsoft.com/office/drawing/2010/main" xmlns="">
                 <a:effectLst>
                   <a:outerShdw dist="35921" dir="2700000" algn="ctr" rotWithShape="0">
                     <a:schemeClr val="bg2"/>
@@ -5799,7 +5811,7 @@
           <p:cNvPr id="5" name="Date Placeholder 4">
             <a:extLst>
               <a:ext uri="{FF2B5EF4-FFF2-40B4-BE49-F238E27FC236}">
-                <a16:creationId xmlns:a16="http://schemas.microsoft.com/office/drawing/2014/main" xmlns="" id="{B732D3DB-7149-E1E5-D5F9-4FC93A788894}"/>
+                <a16:creationId xmlns:a16="http://schemas.microsoft.com/office/drawing/2014/main" id="{B732D3DB-7149-E1E5-D5F9-4FC93A788894}"/>
               </a:ext>
             </a:extLst>
           </p:cNvPr>
@@ -5817,7 +5829,7 @@
           <a:p>
             <a:fld id="{0A7C7B6C-E68D-4047-8A1E-3C7BD2842AF7}" type="datetime1">
               <a:rPr lang="en-IN" smtClean="0"/>
-              <a:t>05/10/26</a:t>
+              <a:t>25-10-2026</a:t>
             </a:fld>
             <a:endParaRPr lang="en-IN"/>
           </a:p>
@@ -5828,7 +5840,7 @@
           <p:cNvPr id="6" name="Footer Placeholder 5">
             <a:extLst>
               <a:ext uri="{FF2B5EF4-FFF2-40B4-BE49-F238E27FC236}">
-                <a16:creationId xmlns:a16="http://schemas.microsoft.com/office/drawing/2014/main" xmlns="" id="{CEBCABB1-7C63-52E3-2815-3651AE7E9F7B}"/>
+                <a16:creationId xmlns:a16="http://schemas.microsoft.com/office/drawing/2014/main" id="{CEBCABB1-7C63-52E3-2815-3651AE7E9F7B}"/>
               </a:ext>
             </a:extLst>
           </p:cNvPr>
@@ -5856,7 +5868,7 @@
           <p:cNvPr id="7" name="Slide Number Placeholder 6">
             <a:extLst>
               <a:ext uri="{FF2B5EF4-FFF2-40B4-BE49-F238E27FC236}">
-                <a16:creationId xmlns:a16="http://schemas.microsoft.com/office/drawing/2014/main" xmlns="" id="{E431EAEC-BCE3-2979-69C6-273309B9FFA7}"/>
+                <a16:creationId xmlns:a16="http://schemas.microsoft.com/office/drawing/2014/main" id="{E431EAEC-BCE3-2979-69C6-273309B9FFA7}"/>
               </a:ext>
             </a:extLst>
           </p:cNvPr>
@@ -5915,7 +5927,7 @@
           <p:cNvPr id="2" name="Title 1">
             <a:extLst>
               <a:ext uri="{FF2B5EF4-FFF2-40B4-BE49-F238E27FC236}">
-                <a16:creationId xmlns:a16="http://schemas.microsoft.com/office/drawing/2014/main" xmlns="" id="{A6ACBE13-A9D6-9564-DA47-597E38E09F70}"/>
+                <a16:creationId xmlns:a16="http://schemas.microsoft.com/office/drawing/2014/main" id="{A6ACBE13-A9D6-9564-DA47-597E38E09F70}"/>
               </a:ext>
             </a:extLst>
           </p:cNvPr>
@@ -5948,7 +5960,7 @@
           <p:cNvPr id="3" name="Content Placeholder 2">
             <a:extLst>
               <a:ext uri="{FF2B5EF4-FFF2-40B4-BE49-F238E27FC236}">
-                <a16:creationId xmlns:a16="http://schemas.microsoft.com/office/drawing/2014/main" xmlns="" id="{8233367C-DAD6-6E34-D21A-A981C09442F2}"/>
+                <a16:creationId xmlns:a16="http://schemas.microsoft.com/office/drawing/2014/main" id="{8233367C-DAD6-6E34-D21A-A981C09442F2}"/>
               </a:ext>
             </a:extLst>
           </p:cNvPr>
@@ -5972,15 +5984,7 @@
                   <a:srgbClr val="FFFF00"/>
                 </a:highlight>
               </a:rPr>
-              <a:t>Get the approval for the following points from your guide through mail before  21-10-2026.(sample attached below</a:t>
-            </a:r>
-            <a:r>
-              <a:rPr lang="en-IN" i="1" dirty="0" smtClean="0">
-                <a:highlight>
-                  <a:srgbClr val="FFFF00"/>
-                </a:highlight>
-              </a:rPr>
-              <a:t>)</a:t>
+              <a:t>Get the approval for the following points from your guide through mail before  21-10-2026.(sample attached below)</a:t>
             </a:r>
           </a:p>
           <a:p>
@@ -5991,20 +5995,6 @@
             </a:endParaRPr>
           </a:p>
           <a:p>
-            <a:endParaRPr lang="en-IN" i="1" dirty="0" smtClean="0">
-              <a:highlight>
-                <a:srgbClr val="FFFF00"/>
-              </a:highlight>
-            </a:endParaRPr>
-          </a:p>
-          <a:p>
-            <a:endParaRPr lang="en-IN" i="1" dirty="0" smtClean="0">
-              <a:highlight>
-                <a:srgbClr val="FFFF00"/>
-              </a:highlight>
-            </a:endParaRPr>
-          </a:p>
-          <a:p>
             <a:endParaRPr lang="en-IN" i="1" dirty="0">
               <a:highlight>
                 <a:srgbClr val="FFFF00"/>
@@ -6012,30 +6002,40 @@
             </a:endParaRPr>
           </a:p>
           <a:p>
-            <a:endParaRPr lang="en-IN" i="1" dirty="0" smtClean="0">
+            <a:endParaRPr lang="en-IN" i="1" dirty="0">
               <a:highlight>
                 <a:srgbClr val="FFFF00"/>
               </a:highlight>
             </a:endParaRPr>
           </a:p>
           <a:p>
-            <a:endParaRPr lang="en-IN" i="1" dirty="0" smtClean="0">
+            <a:endParaRPr lang="en-IN" i="1" dirty="0">
               <a:highlight>
                 <a:srgbClr val="FFFF00"/>
               </a:highlight>
             </a:endParaRPr>
           </a:p>
           <a:p>
+            <a:endParaRPr lang="en-IN" i="1" dirty="0">
+              <a:highlight>
+                <a:srgbClr val="FFFF00"/>
+              </a:highlight>
+            </a:endParaRPr>
+          </a:p>
+          <a:p>
+            <a:endParaRPr lang="en-IN" i="1" dirty="0">
+              <a:highlight>
+                <a:srgbClr val="FFFF00"/>
+              </a:highlight>
+            </a:endParaRPr>
+          </a:p>
+          <a:p>
             <a:pPr marL="0" indent="0">
               <a:buNone/>
             </a:pPr>
             <a:r>
-              <a:rPr lang="en-IN" dirty="0" smtClean="0"/>
-              <a:t>All </a:t>
-            </a:r>
-            <a:r>
               <a:rPr lang="en-IN" dirty="0"/>
-              <a:t>the above aspects are addressed and updated by the project team.</a:t>
+              <a:t>All the above aspects are addressed and updated by the project team.</a:t>
             </a:r>
           </a:p>
           <a:p>
@@ -6062,7 +6062,7 @@
           <p:cNvPr id="4" name="Date Placeholder 3">
             <a:extLst>
               <a:ext uri="{FF2B5EF4-FFF2-40B4-BE49-F238E27FC236}">
-                <a16:creationId xmlns:a16="http://schemas.microsoft.com/office/drawing/2014/main" xmlns="" id="{C7827C50-3ED3-2DB6-C227-6784C6CA9E30}"/>
+                <a16:creationId xmlns:a16="http://schemas.microsoft.com/office/drawing/2014/main" id="{C7827C50-3ED3-2DB6-C227-6784C6CA9E30}"/>
               </a:ext>
             </a:extLst>
           </p:cNvPr>
@@ -6080,7 +6080,7 @@
           <a:p>
             <a:fld id="{FEA886FF-1BA7-4533-94E6-869CE1E2970B}" type="datetime1">
               <a:rPr lang="en-IN" smtClean="0"/>
-              <a:t>05/10/26</a:t>
+              <a:t>25-10-2026</a:t>
             </a:fld>
             <a:endParaRPr lang="en-IN" dirty="0"/>
           </a:p>
@@ -6091,7 +6091,7 @@
           <p:cNvPr id="5" name="Footer Placeholder 4">
             <a:extLst>
               <a:ext uri="{FF2B5EF4-FFF2-40B4-BE49-F238E27FC236}">
-                <a16:creationId xmlns:a16="http://schemas.microsoft.com/office/drawing/2014/main" xmlns="" id="{56664170-792F-28F8-1C31-5F7A8D69F97E}"/>
+                <a16:creationId xmlns:a16="http://schemas.microsoft.com/office/drawing/2014/main" id="{56664170-792F-28F8-1C31-5F7A8D69F97E}"/>
               </a:ext>
             </a:extLst>
           </p:cNvPr>
@@ -6119,7 +6119,7 @@
           <p:cNvPr id="6" name="Slide Number Placeholder 5">
             <a:extLst>
               <a:ext uri="{FF2B5EF4-FFF2-40B4-BE49-F238E27FC236}">
-                <a16:creationId xmlns:a16="http://schemas.microsoft.com/office/drawing/2014/main" xmlns="" id="{EE16528B-72DB-0275-6A94-33ABB5CD7075}"/>
+                <a16:creationId xmlns:a16="http://schemas.microsoft.com/office/drawing/2014/main" id="{EE16528B-72DB-0275-6A94-33ABB5CD7075}"/>
               </a:ext>
             </a:extLst>
           </p:cNvPr>
@@ -6183,13 +6183,6 @@
   <p:clrMapOvr>
     <a:masterClrMapping/>
   </p:clrMapOvr>
-  <p:timing>
-    <p:tnLst>
-      <p:par>
-        <p:cTn xmlns:p14="http://schemas.microsoft.com/office/powerpoint/2010/main" id="1" dur="indefinite" restart="never" nodeType="tmRoot"/>
-      </p:par>
-    </p:tnLst>
-  </p:timing>
 </p:sld>
 </file>
 
@@ -6215,7 +6208,7 @@
           <p:cNvPr id="3" name="Content Placeholder 2">
             <a:extLst>
               <a:ext uri="{FF2B5EF4-FFF2-40B4-BE49-F238E27FC236}">
-                <a16:creationId xmlns:a16="http://schemas.microsoft.com/office/drawing/2014/main" xmlns="" id="{4D68A428-04DA-E6A8-7606-5D2FE5F31C52}"/>
+                <a16:creationId xmlns:a16="http://schemas.microsoft.com/office/drawing/2014/main" id="{4D68A428-04DA-E6A8-7606-5D2FE5F31C52}"/>
               </a:ext>
             </a:extLst>
           </p:cNvPr>
@@ -6347,7 +6340,7 @@
           <p:cNvPr id="4" name="object 2">
             <a:extLst>
               <a:ext uri="{FF2B5EF4-FFF2-40B4-BE49-F238E27FC236}">
-                <a16:creationId xmlns:a16="http://schemas.microsoft.com/office/drawing/2014/main" xmlns="" id="{027305EA-516C-11F8-8A54-2BA046094ABC}"/>
+                <a16:creationId xmlns:a16="http://schemas.microsoft.com/office/drawing/2014/main" id="{027305EA-516C-11F8-8A54-2BA046094ABC}"/>
               </a:ext>
             </a:extLst>
           </p:cNvPr>
@@ -6400,7 +6393,7 @@
           <p:cNvPr id="7" name="Date Placeholder 6">
             <a:extLst>
               <a:ext uri="{FF2B5EF4-FFF2-40B4-BE49-F238E27FC236}">
-                <a16:creationId xmlns:a16="http://schemas.microsoft.com/office/drawing/2014/main" xmlns="" id="{779E6AA7-AE20-8A91-BA42-261BF76A2F8B}"/>
+                <a16:creationId xmlns:a16="http://schemas.microsoft.com/office/drawing/2014/main" id="{779E6AA7-AE20-8A91-BA42-261BF76A2F8B}"/>
               </a:ext>
             </a:extLst>
           </p:cNvPr>
@@ -6418,7 +6411,7 @@
           <a:p>
             <a:fld id="{61736562-4E3F-4038-A291-A7AE35CC3E6A}" type="datetime1">
               <a:rPr lang="en-IN" smtClean="0"/>
-              <a:t>05/10/26</a:t>
+              <a:t>25-10-2026</a:t>
             </a:fld>
             <a:endParaRPr lang="en-IN"/>
           </a:p>
@@ -6429,7 +6422,7 @@
           <p:cNvPr id="8" name="Footer Placeholder 7">
             <a:extLst>
               <a:ext uri="{FF2B5EF4-FFF2-40B4-BE49-F238E27FC236}">
-                <a16:creationId xmlns:a16="http://schemas.microsoft.com/office/drawing/2014/main" xmlns="" id="{B77FE434-77F0-B8BE-9198-66090332F3F0}"/>
+                <a16:creationId xmlns:a16="http://schemas.microsoft.com/office/drawing/2014/main" id="{B77FE434-77F0-B8BE-9198-66090332F3F0}"/>
               </a:ext>
             </a:extLst>
           </p:cNvPr>
@@ -6457,7 +6450,7 @@
           <p:cNvPr id="9" name="Slide Number Placeholder 8">
             <a:extLst>
               <a:ext uri="{FF2B5EF4-FFF2-40B4-BE49-F238E27FC236}">
-                <a16:creationId xmlns:a16="http://schemas.microsoft.com/office/drawing/2014/main" xmlns="" id="{5AD6A9DA-AEE9-F6FE-EFA8-06396314F7E6}"/>
+                <a16:creationId xmlns:a16="http://schemas.microsoft.com/office/drawing/2014/main" id="{5AD6A9DA-AEE9-F6FE-EFA8-06396314F7E6}"/>
               </a:ext>
             </a:extLst>
           </p:cNvPr>
@@ -6491,13 +6484,6 @@
   <p:clrMapOvr>
     <a:masterClrMapping/>
   </p:clrMapOvr>
-  <p:timing>
-    <p:tnLst>
-      <p:par>
-        <p:cTn xmlns:p14="http://schemas.microsoft.com/office/powerpoint/2010/main" id="1" dur="indefinite" restart="never" nodeType="tmRoot"/>
-      </p:par>
-    </p:tnLst>
-  </p:timing>
 </p:sld>
 </file>
 
@@ -6509,7 +6495,7 @@
         <p:cNvPr id="1" name="">
           <a:extLst>
             <a:ext uri="{FF2B5EF4-FFF2-40B4-BE49-F238E27FC236}">
-              <a16:creationId xmlns:a16="http://schemas.microsoft.com/office/drawing/2014/main" xmlns="" id="{30BD95E8-8D7C-F548-8B75-23C3B2B15B19}"/>
+              <a16:creationId xmlns:a16="http://schemas.microsoft.com/office/drawing/2014/main" id="{30BD95E8-8D7C-F548-8B75-23C3B2B15B19}"/>
             </a:ext>
           </a:extLst>
         </p:cNvPr>
@@ -6529,7 +6515,7 @@
           <p:cNvPr id="3" name="Content Placeholder 2">
             <a:extLst>
               <a:ext uri="{FF2B5EF4-FFF2-40B4-BE49-F238E27FC236}">
-                <a16:creationId xmlns:a16="http://schemas.microsoft.com/office/drawing/2014/main" xmlns="" id="{35DDED8F-1EBD-2E10-598E-0CA3F56F05DF}"/>
+                <a16:creationId xmlns:a16="http://schemas.microsoft.com/office/drawing/2014/main" id="{35DDED8F-1EBD-2E10-598E-0CA3F56F05DF}"/>
               </a:ext>
             </a:extLst>
           </p:cNvPr>
@@ -6661,7 +6647,7 @@
           <p:cNvPr id="4" name="object 2">
             <a:extLst>
               <a:ext uri="{FF2B5EF4-FFF2-40B4-BE49-F238E27FC236}">
-                <a16:creationId xmlns:a16="http://schemas.microsoft.com/office/drawing/2014/main" xmlns="" id="{156C6ACB-BF9E-DB99-B99C-4896C652737E}"/>
+                <a16:creationId xmlns:a16="http://schemas.microsoft.com/office/drawing/2014/main" id="{156C6ACB-BF9E-DB99-B99C-4896C652737E}"/>
               </a:ext>
             </a:extLst>
           </p:cNvPr>
@@ -6714,7 +6700,7 @@
           <p:cNvPr id="2" name="Date Placeholder 1">
             <a:extLst>
               <a:ext uri="{FF2B5EF4-FFF2-40B4-BE49-F238E27FC236}">
-                <a16:creationId xmlns:a16="http://schemas.microsoft.com/office/drawing/2014/main" xmlns="" id="{7C3D067F-DF0A-3BD2-0B9E-C22E39B7F8C0}"/>
+                <a16:creationId xmlns:a16="http://schemas.microsoft.com/office/drawing/2014/main" id="{7C3D067F-DF0A-3BD2-0B9E-C22E39B7F8C0}"/>
               </a:ext>
             </a:extLst>
           </p:cNvPr>
@@ -6732,7 +6718,7 @@
           <a:p>
             <a:fld id="{22261D5D-2F82-4210-B67C-C3AADE7FED47}" type="datetime1">
               <a:rPr lang="en-IN" smtClean="0"/>
-              <a:t>05/10/26</a:t>
+              <a:t>25-10-2026</a:t>
             </a:fld>
             <a:endParaRPr lang="en-IN"/>
           </a:p>
@@ -6743,7 +6729,7 @@
           <p:cNvPr id="5" name="Footer Placeholder 4">
             <a:extLst>
               <a:ext uri="{FF2B5EF4-FFF2-40B4-BE49-F238E27FC236}">
-                <a16:creationId xmlns:a16="http://schemas.microsoft.com/office/drawing/2014/main" xmlns="" id="{E1EFD8C3-C2D0-4BBB-7FD8-43FE2C084A64}"/>
+                <a16:creationId xmlns:a16="http://schemas.microsoft.com/office/drawing/2014/main" id="{E1EFD8C3-C2D0-4BBB-7FD8-43FE2C084A64}"/>
               </a:ext>
             </a:extLst>
           </p:cNvPr>
@@ -6771,7 +6757,7 @@
           <p:cNvPr id="6" name="Slide Number Placeholder 5">
             <a:extLst>
               <a:ext uri="{FF2B5EF4-FFF2-40B4-BE49-F238E27FC236}">
-                <a16:creationId xmlns:a16="http://schemas.microsoft.com/office/drawing/2014/main" xmlns="" id="{8BB9991A-41D4-F0AB-EF39-ACE70C817D43}"/>
+                <a16:creationId xmlns:a16="http://schemas.microsoft.com/office/drawing/2014/main" id="{8BB9991A-41D4-F0AB-EF39-ACE70C817D43}"/>
               </a:ext>
             </a:extLst>
           </p:cNvPr>
@@ -6805,13 +6791,6 @@
   <p:clrMapOvr>
     <a:masterClrMapping/>
   </p:clrMapOvr>
-  <p:timing>
-    <p:tnLst>
-      <p:par>
-        <p:cTn xmlns:p14="http://schemas.microsoft.com/office/powerpoint/2010/main" id="1" dur="indefinite" restart="never" nodeType="tmRoot"/>
-      </p:par>
-    </p:tnLst>
-  </p:timing>
 </p:sld>
 </file>
 
@@ -6823,7 +6802,7 @@
         <p:cNvPr id="1" name="">
           <a:extLst>
             <a:ext uri="{FF2B5EF4-FFF2-40B4-BE49-F238E27FC236}">
-              <a16:creationId xmlns:a16="http://schemas.microsoft.com/office/drawing/2014/main" xmlns="" id="{8FF0AE58-8206-476A-BECC-A1ADC0EA154A}"/>
+              <a16:creationId xmlns:a16="http://schemas.microsoft.com/office/drawing/2014/main" id="{8FF0AE58-8206-476A-BECC-A1ADC0EA154A}"/>
             </a:ext>
           </a:extLst>
         </p:cNvPr>
@@ -6843,7 +6822,7 @@
           <p:cNvPr id="4" name="object 2">
             <a:extLst>
               <a:ext uri="{FF2B5EF4-FFF2-40B4-BE49-F238E27FC236}">
-                <a16:creationId xmlns:a16="http://schemas.microsoft.com/office/drawing/2014/main" xmlns="" id="{435FB437-6170-6BA2-1A38-A902855A3E61}"/>
+                <a16:creationId xmlns:a16="http://schemas.microsoft.com/office/drawing/2014/main" id="{435FB437-6170-6BA2-1A38-A902855A3E61}"/>
               </a:ext>
             </a:extLst>
           </p:cNvPr>
@@ -6896,7 +6875,7 @@
           <p:cNvPr id="8" name="Date Placeholder 7">
             <a:extLst>
               <a:ext uri="{FF2B5EF4-FFF2-40B4-BE49-F238E27FC236}">
-                <a16:creationId xmlns:a16="http://schemas.microsoft.com/office/drawing/2014/main" xmlns="" id="{913BC6E0-D294-E70D-8B27-13FBFEE5E6F7}"/>
+                <a16:creationId xmlns:a16="http://schemas.microsoft.com/office/drawing/2014/main" id="{913BC6E0-D294-E70D-8B27-13FBFEE5E6F7}"/>
               </a:ext>
             </a:extLst>
           </p:cNvPr>
@@ -6914,7 +6893,7 @@
           <a:p>
             <a:fld id="{E919193B-09C0-4C85-858C-650926A9B146}" type="datetime1">
               <a:rPr lang="en-IN" smtClean="0"/>
-              <a:t>05/10/26</a:t>
+              <a:t>25-10-2026</a:t>
             </a:fld>
             <a:endParaRPr lang="en-IN"/>
           </a:p>
@@ -6925,7 +6904,7 @@
           <p:cNvPr id="9" name="Footer Placeholder 8">
             <a:extLst>
               <a:ext uri="{FF2B5EF4-FFF2-40B4-BE49-F238E27FC236}">
-                <a16:creationId xmlns:a16="http://schemas.microsoft.com/office/drawing/2014/main" xmlns="" id="{1F284BA2-3334-3EC1-0E81-4C909589729F}"/>
+                <a16:creationId xmlns:a16="http://schemas.microsoft.com/office/drawing/2014/main" id="{1F284BA2-3334-3EC1-0E81-4C909589729F}"/>
               </a:ext>
             </a:extLst>
           </p:cNvPr>
@@ -6953,7 +6932,7 @@
           <p:cNvPr id="10" name="Slide Number Placeholder 9">
             <a:extLst>
               <a:ext uri="{FF2B5EF4-FFF2-40B4-BE49-F238E27FC236}">
-                <a16:creationId xmlns:a16="http://schemas.microsoft.com/office/drawing/2014/main" xmlns="" id="{5A8F14EB-D02F-8EDE-87F4-A3F7E8D20C44}"/>
+                <a16:creationId xmlns:a16="http://schemas.microsoft.com/office/drawing/2014/main" id="{5A8F14EB-D02F-8EDE-87F4-A3F7E8D20C44}"/>
               </a:ext>
             </a:extLst>
           </p:cNvPr>
@@ -6996,16 +6975,46 @@
                 <a:tableStyleId>{5C22544A-7EE6-4342-B048-85BDC9FD1C3A}</a:tableStyleId>
               </a:tblPr>
               <a:tblGrid>
-                <a:gridCol w="2057400"/>
-                <a:gridCol w="2057400"/>
-                <a:gridCol w="2240280"/>
-                <a:gridCol w="2514600"/>
-                <a:gridCol w="2560320"/>
+                <a:gridCol w="2057400">
+                  <a:extLst>
+                    <a:ext uri="{9D8B030D-6E8A-4147-A177-3AD203B41FA5}">
+                      <a16:colId xmlns:a16="http://schemas.microsoft.com/office/drawing/2014/main" val="20000"/>
+                    </a:ext>
+                  </a:extLst>
+                </a:gridCol>
+                <a:gridCol w="2057400">
+                  <a:extLst>
+                    <a:ext uri="{9D8B030D-6E8A-4147-A177-3AD203B41FA5}">
+                      <a16:colId xmlns:a16="http://schemas.microsoft.com/office/drawing/2014/main" val="20001"/>
+                    </a:ext>
+                  </a:extLst>
+                </a:gridCol>
+                <a:gridCol w="2240280">
+                  <a:extLst>
+                    <a:ext uri="{9D8B030D-6E8A-4147-A177-3AD203B41FA5}">
+                      <a16:colId xmlns:a16="http://schemas.microsoft.com/office/drawing/2014/main" val="20002"/>
+                    </a:ext>
+                  </a:extLst>
+                </a:gridCol>
+                <a:gridCol w="2514600">
+                  <a:extLst>
+                    <a:ext uri="{9D8B030D-6E8A-4147-A177-3AD203B41FA5}">
+                      <a16:colId xmlns:a16="http://schemas.microsoft.com/office/drawing/2014/main" val="20003"/>
+                    </a:ext>
+                  </a:extLst>
+                </a:gridCol>
+                <a:gridCol w="2560320">
+                  <a:extLst>
+                    <a:ext uri="{9D8B030D-6E8A-4147-A177-3AD203B41FA5}">
+                      <a16:colId xmlns:a16="http://schemas.microsoft.com/office/drawing/2014/main" val="20004"/>
+                    </a:ext>
+                  </a:extLst>
+                </a:gridCol>
               </a:tblGrid>
               <a:tr h="792480">
                 <a:tc>
                   <a:txBody>
-                    <a:bodyPr wrap="square"/>
+                    <a:bodyPr/>
                     <a:lstStyle/>
                     <a:p>
                       <a:pPr>
@@ -7031,7 +7040,7 @@
                 </a:tc>
                 <a:tc>
                   <a:txBody>
-                    <a:bodyPr wrap="square"/>
+                    <a:bodyPr/>
                     <a:lstStyle/>
                     <a:p>
                       <a:pPr>
@@ -7057,7 +7066,7 @@
                 </a:tc>
                 <a:tc>
                   <a:txBody>
-                    <a:bodyPr wrap="square"/>
+                    <a:bodyPr/>
                     <a:lstStyle/>
                     <a:p>
                       <a:pPr>
@@ -7083,7 +7092,7 @@
                 </a:tc>
                 <a:tc>
                   <a:txBody>
-                    <a:bodyPr wrap="square"/>
+                    <a:bodyPr/>
                     <a:lstStyle/>
                     <a:p>
                       <a:pPr>
@@ -7109,7 +7118,7 @@
                 </a:tc>
                 <a:tc>
                   <a:txBody>
-                    <a:bodyPr wrap="square"/>
+                    <a:bodyPr/>
                     <a:lstStyle/>
                     <a:p>
                       <a:pPr>
@@ -7133,11 +7142,16 @@
                     </a:solidFill>
                   </a:tcPr>
                 </a:tc>
+                <a:extLst>
+                  <a:ext uri="{0D108BD9-81ED-4DB2-BD59-A6C34878D82A}">
+                    <a16:rowId xmlns:a16="http://schemas.microsoft.com/office/drawing/2014/main" val="10000"/>
+                  </a:ext>
+                </a:extLst>
               </a:tr>
               <a:tr h="792480">
                 <a:tc>
                   <a:txBody>
-                    <a:bodyPr wrap="square"/>
+                    <a:bodyPr/>
                     <a:lstStyle/>
                     <a:p>
                       <a:pPr>
@@ -7163,7 +7177,7 @@
                 </a:tc>
                 <a:tc>
                   <a:txBody>
-                    <a:bodyPr wrap="square"/>
+                    <a:bodyPr/>
                     <a:lstStyle/>
                     <a:p>
                       <a:pPr>
@@ -7189,7 +7203,7 @@
                 </a:tc>
                 <a:tc>
                   <a:txBody>
-                    <a:bodyPr wrap="square"/>
+                    <a:bodyPr/>
                     <a:lstStyle/>
                     <a:p>
                       <a:pPr>
@@ -7215,7 +7229,7 @@
                 </a:tc>
                 <a:tc>
                   <a:txBody>
-                    <a:bodyPr wrap="square"/>
+                    <a:bodyPr/>
                     <a:lstStyle/>
                     <a:p>
                       <a:pPr>
@@ -7256,7 +7270,7 @@
                 </a:tc>
                 <a:tc>
                   <a:txBody>
-                    <a:bodyPr wrap="square"/>
+                    <a:bodyPr/>
                     <a:lstStyle/>
                     <a:p>
                       <a:pPr>
@@ -7280,11 +7294,16 @@
                     </a:solidFill>
                   </a:tcPr>
                 </a:tc>
+                <a:extLst>
+                  <a:ext uri="{0D108BD9-81ED-4DB2-BD59-A6C34878D82A}">
+                    <a16:rowId xmlns:a16="http://schemas.microsoft.com/office/drawing/2014/main" val="10001"/>
+                  </a:ext>
+                </a:extLst>
               </a:tr>
               <a:tr h="792480">
                 <a:tc>
                   <a:txBody>
-                    <a:bodyPr wrap="square"/>
+                    <a:bodyPr/>
                     <a:lstStyle/>
                     <a:p>
                       <a:pPr>
@@ -7310,7 +7329,7 @@
                 </a:tc>
                 <a:tc>
                   <a:txBody>
-                    <a:bodyPr wrap="square"/>
+                    <a:bodyPr/>
                     <a:lstStyle/>
                     <a:p>
                       <a:pPr>
@@ -7336,7 +7355,7 @@
                 </a:tc>
                 <a:tc>
                   <a:txBody>
-                    <a:bodyPr wrap="square"/>
+                    <a:bodyPr/>
                     <a:lstStyle/>
                     <a:p>
                       <a:pPr>
@@ -7362,7 +7381,7 @@
                 </a:tc>
                 <a:tc>
                   <a:txBody>
-                    <a:bodyPr wrap="square"/>
+                    <a:bodyPr/>
                     <a:lstStyle/>
                     <a:p>
                       <a:pPr>
@@ -7403,7 +7422,7 @@
                 </a:tc>
                 <a:tc>
                   <a:txBody>
-                    <a:bodyPr wrap="square"/>
+                    <a:bodyPr/>
                     <a:lstStyle/>
                     <a:p>
                       <a:pPr>
@@ -7427,11 +7446,16 @@
                     </a:solidFill>
                   </a:tcPr>
                 </a:tc>
+                <a:extLst>
+                  <a:ext uri="{0D108BD9-81ED-4DB2-BD59-A6C34878D82A}">
+                    <a16:rowId xmlns:a16="http://schemas.microsoft.com/office/drawing/2014/main" val="10002"/>
+                  </a:ext>
+                </a:extLst>
               </a:tr>
               <a:tr h="792480">
                 <a:tc>
                   <a:txBody>
-                    <a:bodyPr wrap="square"/>
+                    <a:bodyPr/>
                     <a:lstStyle/>
                     <a:p>
                       <a:pPr>
@@ -7457,7 +7481,7 @@
                 </a:tc>
                 <a:tc>
                   <a:txBody>
-                    <a:bodyPr wrap="square"/>
+                    <a:bodyPr/>
                     <a:lstStyle/>
                     <a:p>
                       <a:pPr>
@@ -7483,7 +7507,7 @@
                 </a:tc>
                 <a:tc>
                   <a:txBody>
-                    <a:bodyPr wrap="square"/>
+                    <a:bodyPr/>
                     <a:lstStyle/>
                     <a:p>
                       <a:pPr>
@@ -7509,7 +7533,7 @@
                 </a:tc>
                 <a:tc>
                   <a:txBody>
-                    <a:bodyPr wrap="square"/>
+                    <a:bodyPr/>
                     <a:lstStyle/>
                     <a:p>
                       <a:pPr>
@@ -7550,7 +7574,7 @@
                 </a:tc>
                 <a:tc>
                   <a:txBody>
-                    <a:bodyPr wrap="square"/>
+                    <a:bodyPr/>
                     <a:lstStyle/>
                     <a:p>
                       <a:pPr>
@@ -7574,11 +7598,16 @@
                     </a:solidFill>
                   </a:tcPr>
                 </a:tc>
+                <a:extLst>
+                  <a:ext uri="{0D108BD9-81ED-4DB2-BD59-A6C34878D82A}">
+                    <a16:rowId xmlns:a16="http://schemas.microsoft.com/office/drawing/2014/main" val="10003"/>
+                  </a:ext>
+                </a:extLst>
               </a:tr>
               <a:tr h="792480">
                 <a:tc>
                   <a:txBody>
-                    <a:bodyPr wrap="square"/>
+                    <a:bodyPr/>
                     <a:lstStyle/>
                     <a:p>
                       <a:pPr>
@@ -7604,7 +7633,7 @@
                 </a:tc>
                 <a:tc>
                   <a:txBody>
-                    <a:bodyPr wrap="square"/>
+                    <a:bodyPr/>
                     <a:lstStyle/>
                     <a:p>
                       <a:pPr>
@@ -7630,7 +7659,7 @@
                 </a:tc>
                 <a:tc>
                   <a:txBody>
-                    <a:bodyPr wrap="square"/>
+                    <a:bodyPr/>
                     <a:lstStyle/>
                     <a:p>
                       <a:pPr>
@@ -7656,7 +7685,7 @@
                 </a:tc>
                 <a:tc>
                   <a:txBody>
-                    <a:bodyPr wrap="square"/>
+                    <a:bodyPr/>
                     <a:lstStyle/>
                     <a:p>
                       <a:pPr>
@@ -7697,7 +7726,7 @@
                 </a:tc>
                 <a:tc>
                   <a:txBody>
-                    <a:bodyPr wrap="square"/>
+                    <a:bodyPr/>
                     <a:lstStyle/>
                     <a:p>
                       <a:pPr>
@@ -7721,11 +7750,16 @@
                     </a:solidFill>
                   </a:tcPr>
                 </a:tc>
+                <a:extLst>
+                  <a:ext uri="{0D108BD9-81ED-4DB2-BD59-A6C34878D82A}">
+                    <a16:rowId xmlns:a16="http://schemas.microsoft.com/office/drawing/2014/main" val="10004"/>
+                  </a:ext>
+                </a:extLst>
               </a:tr>
               <a:tr h="792480">
                 <a:tc>
                   <a:txBody>
-                    <a:bodyPr wrap="square"/>
+                    <a:bodyPr/>
                     <a:lstStyle/>
                     <a:p>
                       <a:pPr>
@@ -7751,7 +7785,7 @@
                 </a:tc>
                 <a:tc>
                   <a:txBody>
-                    <a:bodyPr wrap="square"/>
+                    <a:bodyPr/>
                     <a:lstStyle/>
                     <a:p>
                       <a:pPr>
@@ -7777,7 +7811,7 @@
                 </a:tc>
                 <a:tc>
                   <a:txBody>
-                    <a:bodyPr wrap="square"/>
+                    <a:bodyPr/>
                     <a:lstStyle/>
                     <a:p>
                       <a:pPr>
@@ -7803,7 +7837,7 @@
                 </a:tc>
                 <a:tc>
                   <a:txBody>
-                    <a:bodyPr wrap="square"/>
+                    <a:bodyPr/>
                     <a:lstStyle/>
                     <a:p>
                       <a:pPr>
@@ -7844,7 +7878,7 @@
                 </a:tc>
                 <a:tc>
                   <a:txBody>
-                    <a:bodyPr wrap="square"/>
+                    <a:bodyPr/>
                     <a:lstStyle/>
                     <a:p>
                       <a:pPr>
@@ -7868,6 +7902,11 @@
                     </a:solidFill>
                   </a:tcPr>
                 </a:tc>
+                <a:extLst>
+                  <a:ext uri="{0D108BD9-81ED-4DB2-BD59-A6C34878D82A}">
+                    <a16:rowId xmlns:a16="http://schemas.microsoft.com/office/drawing/2014/main" val="10005"/>
+                  </a:ext>
+                </a:extLst>
               </a:tr>
             </a:tbl>
           </a:graphicData>
@@ -7894,7 +7933,7 @@
         <p:cNvPr id="1" name="">
           <a:extLst>
             <a:ext uri="{FF2B5EF4-FFF2-40B4-BE49-F238E27FC236}">
-              <a16:creationId xmlns:a16="http://schemas.microsoft.com/office/drawing/2014/main" xmlns="" id="{9FD64C5E-26B3-2EE9-895A-F822E4C49ED0}"/>
+              <a16:creationId xmlns:a16="http://schemas.microsoft.com/office/drawing/2014/main" id="{9FD64C5E-26B3-2EE9-895A-F822E4C49ED0}"/>
             </a:ext>
           </a:extLst>
         </p:cNvPr>
@@ -7914,7 +7953,7 @@
           <p:cNvPr id="3" name="Content Placeholder 2">
             <a:extLst>
               <a:ext uri="{FF2B5EF4-FFF2-40B4-BE49-F238E27FC236}">
-                <a16:creationId xmlns:a16="http://schemas.microsoft.com/office/drawing/2014/main" xmlns="" id="{F07F8AC8-6380-9217-CA4C-1FBF1C25C60E}"/>
+                <a16:creationId xmlns:a16="http://schemas.microsoft.com/office/drawing/2014/main" id="{F07F8AC8-6380-9217-CA4C-1FBF1C25C60E}"/>
               </a:ext>
             </a:extLst>
           </p:cNvPr>
@@ -8046,7 +8085,7 @@
           <p:cNvPr id="4" name="object 2">
             <a:extLst>
               <a:ext uri="{FF2B5EF4-FFF2-40B4-BE49-F238E27FC236}">
-                <a16:creationId xmlns:a16="http://schemas.microsoft.com/office/drawing/2014/main" xmlns="" id="{2E07AC55-BA5E-4123-39E6-B79860C6C9EE}"/>
+                <a16:creationId xmlns:a16="http://schemas.microsoft.com/office/drawing/2014/main" id="{2E07AC55-BA5E-4123-39E6-B79860C6C9EE}"/>
               </a:ext>
             </a:extLst>
           </p:cNvPr>
@@ -8099,7 +8138,7 @@
           <p:cNvPr id="2" name="Date Placeholder 1">
             <a:extLst>
               <a:ext uri="{FF2B5EF4-FFF2-40B4-BE49-F238E27FC236}">
-                <a16:creationId xmlns:a16="http://schemas.microsoft.com/office/drawing/2014/main" xmlns="" id="{A2430A72-466B-CBDE-2F02-635BA91A98AF}"/>
+                <a16:creationId xmlns:a16="http://schemas.microsoft.com/office/drawing/2014/main" id="{A2430A72-466B-CBDE-2F02-635BA91A98AF}"/>
               </a:ext>
             </a:extLst>
           </p:cNvPr>
@@ -8117,7 +8156,7 @@
           <a:p>
             <a:fld id="{49AE986A-8308-4C4E-A0F3-DDD9B5B25762}" type="datetime1">
               <a:rPr lang="en-IN" smtClean="0"/>
-              <a:t>05/10/26</a:t>
+              <a:t>25-10-2026</a:t>
             </a:fld>
             <a:endParaRPr lang="en-IN"/>
           </a:p>
@@ -8128,7 +8167,7 @@
           <p:cNvPr id="5" name="Footer Placeholder 4">
             <a:extLst>
               <a:ext uri="{FF2B5EF4-FFF2-40B4-BE49-F238E27FC236}">
-                <a16:creationId xmlns:a16="http://schemas.microsoft.com/office/drawing/2014/main" xmlns="" id="{1711DDA3-7A7C-1F61-1795-3A01ED678FAB}"/>
+                <a16:creationId xmlns:a16="http://schemas.microsoft.com/office/drawing/2014/main" id="{1711DDA3-7A7C-1F61-1795-3A01ED678FAB}"/>
               </a:ext>
             </a:extLst>
           </p:cNvPr>
@@ -8156,7 +8195,7 @@
           <p:cNvPr id="6" name="Slide Number Placeholder 5">
             <a:extLst>
               <a:ext uri="{FF2B5EF4-FFF2-40B4-BE49-F238E27FC236}">
-                <a16:creationId xmlns:a16="http://schemas.microsoft.com/office/drawing/2014/main" xmlns="" id="{D94E3226-1DB1-3A4D-CE37-4A2AD48EF1F1}"/>
+                <a16:creationId xmlns:a16="http://schemas.microsoft.com/office/drawing/2014/main" id="{D94E3226-1DB1-3A4D-CE37-4A2AD48EF1F1}"/>
               </a:ext>
             </a:extLst>
           </p:cNvPr>
@@ -8201,7 +8240,7 @@
         <p:cNvPr id="1" name="">
           <a:extLst>
             <a:ext uri="{FF2B5EF4-FFF2-40B4-BE49-F238E27FC236}">
-              <a16:creationId xmlns:a16="http://schemas.microsoft.com/office/drawing/2014/main" xmlns="" id="{FFF50AAC-0156-D6F5-7153-C7919999408B}"/>
+              <a16:creationId xmlns:a16="http://schemas.microsoft.com/office/drawing/2014/main" id="{FFF50AAC-0156-D6F5-7153-C7919999408B}"/>
             </a:ext>
           </a:extLst>
         </p:cNvPr>
@@ -8221,7 +8260,7 @@
           <p:cNvPr id="3" name="Content Placeholder 2">
             <a:extLst>
               <a:ext uri="{FF2B5EF4-FFF2-40B4-BE49-F238E27FC236}">
-                <a16:creationId xmlns:a16="http://schemas.microsoft.com/office/drawing/2014/main" xmlns="" id="{6283ADE1-559A-2DC2-A801-6A915E106C60}"/>
+                <a16:creationId xmlns:a16="http://schemas.microsoft.com/office/drawing/2014/main" id="{6283ADE1-559A-2DC2-A801-6A915E106C60}"/>
               </a:ext>
             </a:extLst>
           </p:cNvPr>
@@ -8376,7 +8415,7 @@
           <p:cNvPr id="4" name="object 2">
             <a:extLst>
               <a:ext uri="{FF2B5EF4-FFF2-40B4-BE49-F238E27FC236}">
-                <a16:creationId xmlns:a16="http://schemas.microsoft.com/office/drawing/2014/main" xmlns="" id="{22BADD22-870A-4D8F-B788-CCCD5C223F9A}"/>
+                <a16:creationId xmlns:a16="http://schemas.microsoft.com/office/drawing/2014/main" id="{22BADD22-870A-4D8F-B788-CCCD5C223F9A}"/>
               </a:ext>
             </a:extLst>
           </p:cNvPr>
@@ -8429,7 +8468,7 @@
           <p:cNvPr id="2" name="Date Placeholder 1">
             <a:extLst>
               <a:ext uri="{FF2B5EF4-FFF2-40B4-BE49-F238E27FC236}">
-                <a16:creationId xmlns:a16="http://schemas.microsoft.com/office/drawing/2014/main" xmlns="" id="{1BE4F0EB-E8F1-14D8-E22A-38E83F9BFA94}"/>
+                <a16:creationId xmlns:a16="http://schemas.microsoft.com/office/drawing/2014/main" id="{1BE4F0EB-E8F1-14D8-E22A-38E83F9BFA94}"/>
               </a:ext>
             </a:extLst>
           </p:cNvPr>
@@ -8450,7 +8489,7 @@
                 <a:latin typeface="Times New Roman" panose="02020603050405020304" pitchFamily="18" charset="0"/>
                 <a:cs typeface="Times New Roman" panose="02020603050405020304" pitchFamily="18" charset="0"/>
               </a:rPr>
-              <a:t>05/10/26</a:t>
+              <a:t>25-10-2026</a:t>
             </a:fld>
             <a:endParaRPr lang="en-IN">
               <a:latin typeface="Times New Roman" panose="02020603050405020304" pitchFamily="18" charset="0"/>
@@ -8464,7 +8503,7 @@
           <p:cNvPr id="5" name="Footer Placeholder 4">
             <a:extLst>
               <a:ext uri="{FF2B5EF4-FFF2-40B4-BE49-F238E27FC236}">
-                <a16:creationId xmlns:a16="http://schemas.microsoft.com/office/drawing/2014/main" xmlns="" id="{76D8B93F-BA73-08B5-E0DD-D434FA25B92B}"/>
+                <a16:creationId xmlns:a16="http://schemas.microsoft.com/office/drawing/2014/main" id="{76D8B93F-BA73-08B5-E0DD-D434FA25B92B}"/>
               </a:ext>
             </a:extLst>
           </p:cNvPr>
@@ -8495,7 +8534,7 @@
           <p:cNvPr id="6" name="Slide Number Placeholder 5">
             <a:extLst>
               <a:ext uri="{FF2B5EF4-FFF2-40B4-BE49-F238E27FC236}">
-                <a16:creationId xmlns:a16="http://schemas.microsoft.com/office/drawing/2014/main" xmlns="" id="{E6BABF72-E9F9-626A-63CD-EA20C0714ABC}"/>
+                <a16:creationId xmlns:a16="http://schemas.microsoft.com/office/drawing/2014/main" id="{E6BABF72-E9F9-626A-63CD-EA20C0714ABC}"/>
               </a:ext>
             </a:extLst>
           </p:cNvPr>
@@ -8530,7 +8569,7 @@
           <p:cNvPr id="7" name="TextBox 6">
             <a:extLst>
               <a:ext uri="{FF2B5EF4-FFF2-40B4-BE49-F238E27FC236}">
-                <a16:creationId xmlns:a16="http://schemas.microsoft.com/office/drawing/2014/main" xmlns="" id="{82632EBB-2D05-8D00-7F98-43CBAFAF06ED}"/>
+                <a16:creationId xmlns:a16="http://schemas.microsoft.com/office/drawing/2014/main" id="{82632EBB-2D05-8D00-7F98-43CBAFAF06ED}"/>
               </a:ext>
             </a:extLst>
           </p:cNvPr>
@@ -8595,7 +8634,7 @@
           <p:cNvPr id="8" name="Picture 7" descr="3 The UN 17 Sustainable Development Goals (SDGs), implemented by all... | Download Scientific Diagram">
             <a:extLst>
               <a:ext uri="{FF2B5EF4-FFF2-40B4-BE49-F238E27FC236}">
-                <a16:creationId xmlns:a16="http://schemas.microsoft.com/office/drawing/2014/main" xmlns="" id="{36180A9B-AA72-E2D6-8362-4CDF7058D84A}"/>
+                <a16:creationId xmlns:a16="http://schemas.microsoft.com/office/drawing/2014/main" id="{36180A9B-AA72-E2D6-8362-4CDF7058D84A}"/>
               </a:ext>
             </a:extLst>
           </p:cNvPr>
@@ -8625,7 +8664,7 @@
           <p:cNvPr id="9" name="Picture 8" descr="What are Technology Readiness Levels (TRL)? - TWI">
             <a:extLst>
               <a:ext uri="{FF2B5EF4-FFF2-40B4-BE49-F238E27FC236}">
-                <a16:creationId xmlns:a16="http://schemas.microsoft.com/office/drawing/2014/main" xmlns="" id="{D1491C9C-07B3-89C3-5FA0-72C9F44F30AC}"/>
+                <a16:creationId xmlns:a16="http://schemas.microsoft.com/office/drawing/2014/main" id="{D1491C9C-07B3-89C3-5FA0-72C9F44F30AC}"/>
               </a:ext>
             </a:extLst>
           </p:cNvPr>
@@ -8671,7 +8710,7 @@
         <p:cNvPr id="1" name="">
           <a:extLst>
             <a:ext uri="{FF2B5EF4-FFF2-40B4-BE49-F238E27FC236}">
-              <a16:creationId xmlns:a16="http://schemas.microsoft.com/office/drawing/2014/main" xmlns="" id="{08D49C0F-2490-21B4-8186-6F75540ACED9}"/>
+              <a16:creationId xmlns:a16="http://schemas.microsoft.com/office/drawing/2014/main" id="{08D49C0F-2490-21B4-8186-6F75540ACED9}"/>
             </a:ext>
           </a:extLst>
         </p:cNvPr>
@@ -8691,7 +8730,7 @@
           <p:cNvPr id="3" name="Content Placeholder 2">
             <a:extLst>
               <a:ext uri="{FF2B5EF4-FFF2-40B4-BE49-F238E27FC236}">
-                <a16:creationId xmlns:a16="http://schemas.microsoft.com/office/drawing/2014/main" xmlns="" id="{5BFBB131-7217-3694-F593-4021591CC64F}"/>
+                <a16:creationId xmlns:a16="http://schemas.microsoft.com/office/drawing/2014/main" id="{5BFBB131-7217-3694-F593-4021591CC64F}"/>
               </a:ext>
             </a:extLst>
           </p:cNvPr>
@@ -8738,7 +8777,7 @@
           <p:cNvPr id="4" name="object 2">
             <a:extLst>
               <a:ext uri="{FF2B5EF4-FFF2-40B4-BE49-F238E27FC236}">
-                <a16:creationId xmlns:a16="http://schemas.microsoft.com/office/drawing/2014/main" xmlns="" id="{5DE9EA00-8D77-8DC9-1AE3-8B6FD1AF6BCC}"/>
+                <a16:creationId xmlns:a16="http://schemas.microsoft.com/office/drawing/2014/main" id="{5DE9EA00-8D77-8DC9-1AE3-8B6FD1AF6BCC}"/>
               </a:ext>
             </a:extLst>
           </p:cNvPr>
@@ -8791,7 +8830,7 @@
           <p:cNvPr id="2" name="Date Placeholder 1">
             <a:extLst>
               <a:ext uri="{FF2B5EF4-FFF2-40B4-BE49-F238E27FC236}">
-                <a16:creationId xmlns:a16="http://schemas.microsoft.com/office/drawing/2014/main" xmlns="" id="{3B40592E-46EE-B4F2-7D01-D3568C2F685A}"/>
+                <a16:creationId xmlns:a16="http://schemas.microsoft.com/office/drawing/2014/main" id="{3B40592E-46EE-B4F2-7D01-D3568C2F685A}"/>
               </a:ext>
             </a:extLst>
           </p:cNvPr>
@@ -8812,7 +8851,7 @@
                 <a:latin typeface="Times New Roman" panose="02020603050405020304" pitchFamily="18" charset="0"/>
                 <a:cs typeface="Times New Roman" panose="02020603050405020304" pitchFamily="18" charset="0"/>
               </a:rPr>
-              <a:t>05/10/26</a:t>
+              <a:t>25-10-2026</a:t>
             </a:fld>
             <a:endParaRPr lang="en-IN">
               <a:latin typeface="Times New Roman" panose="02020603050405020304" pitchFamily="18" charset="0"/>
@@ -8826,7 +8865,7 @@
           <p:cNvPr id="5" name="Footer Placeholder 4">
             <a:extLst>
               <a:ext uri="{FF2B5EF4-FFF2-40B4-BE49-F238E27FC236}">
-                <a16:creationId xmlns:a16="http://schemas.microsoft.com/office/drawing/2014/main" xmlns="" id="{5BCDC439-5940-84EE-247A-E3018795A431}"/>
+                <a16:creationId xmlns:a16="http://schemas.microsoft.com/office/drawing/2014/main" id="{5BCDC439-5940-84EE-247A-E3018795A431}"/>
               </a:ext>
             </a:extLst>
           </p:cNvPr>
@@ -8857,7 +8896,7 @@
           <p:cNvPr id="6" name="Slide Number Placeholder 5">
             <a:extLst>
               <a:ext uri="{FF2B5EF4-FFF2-40B4-BE49-F238E27FC236}">
-                <a16:creationId xmlns:a16="http://schemas.microsoft.com/office/drawing/2014/main" xmlns="" id="{A6CB23C8-7091-8CFB-BF2C-3A19CCA810FF}"/>
+                <a16:creationId xmlns:a16="http://schemas.microsoft.com/office/drawing/2014/main" id="{A6CB23C8-7091-8CFB-BF2C-3A19CCA810FF}"/>
               </a:ext>
             </a:extLst>
           </p:cNvPr>
@@ -8932,7 +8971,7 @@
         <p:cNvPr id="1" name="">
           <a:extLst>
             <a:ext uri="{FF2B5EF4-FFF2-40B4-BE49-F238E27FC236}">
-              <a16:creationId xmlns:a16="http://schemas.microsoft.com/office/drawing/2014/main" xmlns="" id="{7FE95AF1-B807-AC15-9C1A-B86677AF63DA}"/>
+              <a16:creationId xmlns:a16="http://schemas.microsoft.com/office/drawing/2014/main" id="{7FE95AF1-B807-AC15-9C1A-B86677AF63DA}"/>
             </a:ext>
           </a:extLst>
         </p:cNvPr>
@@ -8952,7 +8991,7 @@
           <p:cNvPr id="3" name="Content Placeholder 2">
             <a:extLst>
               <a:ext uri="{FF2B5EF4-FFF2-40B4-BE49-F238E27FC236}">
-                <a16:creationId xmlns:a16="http://schemas.microsoft.com/office/drawing/2014/main" xmlns="" id="{EEF324FF-B70A-2FC0-8FD0-C802E31DDBD0}"/>
+                <a16:creationId xmlns:a16="http://schemas.microsoft.com/office/drawing/2014/main" id="{EEF324FF-B70A-2FC0-8FD0-C802E31DDBD0}"/>
               </a:ext>
             </a:extLst>
           </p:cNvPr>
@@ -9156,7 +9195,7 @@
           <p:cNvPr id="4" name="object 2">
             <a:extLst>
               <a:ext uri="{FF2B5EF4-FFF2-40B4-BE49-F238E27FC236}">
-                <a16:creationId xmlns:a16="http://schemas.microsoft.com/office/drawing/2014/main" xmlns="" id="{0C9A0194-5820-F292-3A94-449C000E51A7}"/>
+                <a16:creationId xmlns:a16="http://schemas.microsoft.com/office/drawing/2014/main" id="{0C9A0194-5820-F292-3A94-449C000E51A7}"/>
               </a:ext>
             </a:extLst>
           </p:cNvPr>
@@ -9209,7 +9248,7 @@
           <p:cNvPr id="2" name="Date Placeholder 1">
             <a:extLst>
               <a:ext uri="{FF2B5EF4-FFF2-40B4-BE49-F238E27FC236}">
-                <a16:creationId xmlns:a16="http://schemas.microsoft.com/office/drawing/2014/main" xmlns="" id="{D4F25267-3005-EC45-A624-B78484DFA4EC}"/>
+                <a16:creationId xmlns:a16="http://schemas.microsoft.com/office/drawing/2014/main" id="{D4F25267-3005-EC45-A624-B78484DFA4EC}"/>
               </a:ext>
             </a:extLst>
           </p:cNvPr>
@@ -9230,7 +9269,7 @@
                 <a:latin typeface="Times New Roman" panose="02020603050405020304" pitchFamily="18" charset="0"/>
                 <a:cs typeface="Times New Roman" panose="02020603050405020304" pitchFamily="18" charset="0"/>
               </a:rPr>
-              <a:t>05/10/26</a:t>
+              <a:t>25-10-2026</a:t>
             </a:fld>
             <a:endParaRPr lang="en-IN">
               <a:latin typeface="Times New Roman" panose="02020603050405020304" pitchFamily="18" charset="0"/>
@@ -9244,7 +9283,7 @@
           <p:cNvPr id="5" name="Footer Placeholder 4">
             <a:extLst>
               <a:ext uri="{FF2B5EF4-FFF2-40B4-BE49-F238E27FC236}">
-                <a16:creationId xmlns:a16="http://schemas.microsoft.com/office/drawing/2014/main" xmlns="" id="{610022FF-AD0C-E15E-5F17-B2827B5546B1}"/>
+                <a16:creationId xmlns:a16="http://schemas.microsoft.com/office/drawing/2014/main" id="{610022FF-AD0C-E15E-5F17-B2827B5546B1}"/>
               </a:ext>
             </a:extLst>
           </p:cNvPr>
@@ -9275,7 +9314,7 @@
           <p:cNvPr id="6" name="Slide Number Placeholder 5">
             <a:extLst>
               <a:ext uri="{FF2B5EF4-FFF2-40B4-BE49-F238E27FC236}">
-                <a16:creationId xmlns:a16="http://schemas.microsoft.com/office/drawing/2014/main" xmlns="" id="{BD8D6198-8B2C-26FB-53D2-A5B87C95A4FB}"/>
+                <a16:creationId xmlns:a16="http://schemas.microsoft.com/office/drawing/2014/main" id="{BD8D6198-8B2C-26FB-53D2-A5B87C95A4FB}"/>
               </a:ext>
             </a:extLst>
           </p:cNvPr>
@@ -9607,7 +9646,7 @@
   <a:extraClrSchemeLst/>
   <a:extLst>
     <a:ext uri="{05A4C25C-085E-4340-85A3-A5531E510DB2}">
-      <thm15:themeFamily xmlns:thm15="http://schemas.microsoft.com/office/thememl/2012/main" xmlns="" name="Office Theme" id="{62F939B6-93AF-4DB8-9C6B-D6C7DFDC589F}" vid="{4A3C46E8-61CC-4603-A589-7422A47A8E4A}"/>
+      <thm15:themeFamily xmlns:thm15="http://schemas.microsoft.com/office/thememl/2012/main" name="Office Theme" id="{62F939B6-93AF-4DB8-9C6B-D6C7DFDC589F}" vid="{4A3C46E8-61CC-4603-A589-7422A47A8E4A}"/>
     </a:ext>
   </a:extLst>
 </a:theme>
@@ -9902,7 +9941,7 @@
   <a:extraClrSchemeLst/>
   <a:extLst>
     <a:ext uri="{05A4C25C-085E-4340-85A3-A5531E510DB2}">
-      <thm15:themeFamily xmlns:thm15="http://schemas.microsoft.com/office/thememl/2012/main" xmlns="" name="Office Theme" id="{62F939B6-93AF-4DB8-9C6B-D6C7DFDC589F}" vid="{4A3C46E8-61CC-4603-A589-7422A47A8E4A}"/>
+      <thm15:themeFamily xmlns:thm15="http://schemas.microsoft.com/office/thememl/2012/main" name="Office Theme" id="{62F939B6-93AF-4DB8-9C6B-D6C7DFDC589F}" vid="{4A3C46E8-61CC-4603-A589-7422A47A8E4A}"/>
     </a:ext>
   </a:extLst>
 </a:theme>
